--- a/2026_SMDM/03_Sampling.pptx
+++ b/2026_SMDM/03_Sampling.pptx
@@ -235,7 +235,7 @@
           <a:p>
             <a:fld id="{E033252C-ECEF-0044-BF19-FBFB46CE84A2}" type="datetimeFigureOut">
               <a:rPr lang="en-US" smtClean="0"/>
-              <a:t>6/12/25</a:t>
+              <a:t>6/27/26</a:t>
             </a:fld>
             <a:endParaRPr lang="en-US"/>
           </a:p>
@@ -733,7 +733,7 @@
           <a:p>
             <a:fld id="{6A8FB48A-BFC4-2846-8228-6201ABA4D0C5}" type="datetimeFigureOut">
               <a:rPr lang="en-US" smtClean="0"/>
-              <a:t>6/12/25</a:t>
+              <a:t>6/27/26</a:t>
             </a:fld>
             <a:endParaRPr lang="en-US"/>
           </a:p>
@@ -931,7 +931,7 @@
           <a:p>
             <a:fld id="{6A8FB48A-BFC4-2846-8228-6201ABA4D0C5}" type="datetimeFigureOut">
               <a:rPr lang="en-US" smtClean="0"/>
-              <a:t>6/12/25</a:t>
+              <a:t>6/27/26</a:t>
             </a:fld>
             <a:endParaRPr lang="en-US"/>
           </a:p>
@@ -1139,7 +1139,7 @@
           <a:p>
             <a:fld id="{6A8FB48A-BFC4-2846-8228-6201ABA4D0C5}" type="datetimeFigureOut">
               <a:rPr lang="en-US" smtClean="0"/>
-              <a:t>6/12/25</a:t>
+              <a:t>6/27/26</a:t>
             </a:fld>
             <a:endParaRPr lang="en-US"/>
           </a:p>
@@ -1337,7 +1337,7 @@
           <a:p>
             <a:fld id="{6A8FB48A-BFC4-2846-8228-6201ABA4D0C5}" type="datetimeFigureOut">
               <a:rPr lang="en-US" smtClean="0"/>
-              <a:t>6/12/25</a:t>
+              <a:t>6/27/26</a:t>
             </a:fld>
             <a:endParaRPr lang="en-US"/>
           </a:p>
@@ -1612,7 +1612,7 @@
           <a:p>
             <a:fld id="{6A8FB48A-BFC4-2846-8228-6201ABA4D0C5}" type="datetimeFigureOut">
               <a:rPr lang="en-US" smtClean="0"/>
-              <a:t>6/12/25</a:t>
+              <a:t>6/27/26</a:t>
             </a:fld>
             <a:endParaRPr lang="en-US"/>
           </a:p>
@@ -1877,7 +1877,7 @@
           <a:p>
             <a:fld id="{6A8FB48A-BFC4-2846-8228-6201ABA4D0C5}" type="datetimeFigureOut">
               <a:rPr lang="en-US" smtClean="0"/>
-              <a:t>6/12/25</a:t>
+              <a:t>6/27/26</a:t>
             </a:fld>
             <a:endParaRPr lang="en-US"/>
           </a:p>
@@ -2289,7 +2289,7 @@
           <a:p>
             <a:fld id="{6A8FB48A-BFC4-2846-8228-6201ABA4D0C5}" type="datetimeFigureOut">
               <a:rPr lang="en-US" smtClean="0"/>
-              <a:t>6/12/25</a:t>
+              <a:t>6/27/26</a:t>
             </a:fld>
             <a:endParaRPr lang="en-US"/>
           </a:p>
@@ -2430,7 +2430,7 @@
           <a:p>
             <a:fld id="{6A8FB48A-BFC4-2846-8228-6201ABA4D0C5}" type="datetimeFigureOut">
               <a:rPr lang="en-US" smtClean="0"/>
-              <a:t>6/12/25</a:t>
+              <a:t>6/27/26</a:t>
             </a:fld>
             <a:endParaRPr lang="en-US"/>
           </a:p>
@@ -2543,7 +2543,7 @@
           <a:p>
             <a:fld id="{6A8FB48A-BFC4-2846-8228-6201ABA4D0C5}" type="datetimeFigureOut">
               <a:rPr lang="en-US" smtClean="0"/>
-              <a:t>6/12/25</a:t>
+              <a:t>6/27/26</a:t>
             </a:fld>
             <a:endParaRPr lang="en-US"/>
           </a:p>
@@ -2854,7 +2854,7 @@
           <a:p>
             <a:fld id="{6A8FB48A-BFC4-2846-8228-6201ABA4D0C5}" type="datetimeFigureOut">
               <a:rPr lang="en-US" smtClean="0"/>
-              <a:t>6/12/25</a:t>
+              <a:t>6/27/26</a:t>
             </a:fld>
             <a:endParaRPr lang="en-US"/>
           </a:p>
@@ -3142,7 +3142,7 @@
           <a:p>
             <a:fld id="{6A8FB48A-BFC4-2846-8228-6201ABA4D0C5}" type="datetimeFigureOut">
               <a:rPr lang="en-US" smtClean="0"/>
-              <a:t>6/12/25</a:t>
+              <a:t>6/27/26</a:t>
             </a:fld>
             <a:endParaRPr lang="en-US"/>
           </a:p>
@@ -3383,7 +3383,7 @@
           <a:p>
             <a:fld id="{6A8FB48A-BFC4-2846-8228-6201ABA4D0C5}" type="datetimeFigureOut">
               <a:rPr lang="en-US" smtClean="0"/>
-              <a:t>6/12/25</a:t>
+              <a:t>6/27/26</a:t>
             </a:fld>
             <a:endParaRPr lang="en-US"/>
           </a:p>
@@ -3806,668 +3806,6 @@
           <a:chExt cx="0" cy="0"/>
         </a:xfrm>
       </p:grpSpPr>
-      <p:graphicFrame>
-        <p:nvGraphicFramePr>
-          <p:cNvPr id="4" name="Content Placeholder 3">
-            <a:extLst>
-              <a:ext uri="{FF2B5EF4-FFF2-40B4-BE49-F238E27FC236}">
-                <a16:creationId xmlns:a16="http://schemas.microsoft.com/office/drawing/2014/main" id="{655314A2-2BED-36EA-B4B2-DECEE9EBBB31}"/>
-              </a:ext>
-            </a:extLst>
-          </p:cNvPr>
-          <p:cNvGraphicFramePr>
-            <a:graphicFrameLocks noGrp="1"/>
-          </p:cNvGraphicFramePr>
-          <p:nvPr>
-            <p:ph idx="1"/>
-          </p:nvPr>
-        </p:nvGraphicFramePr>
-        <p:xfrm>
-          <a:off x="1208690" y="942340"/>
-          <a:ext cx="10720551" cy="4973320"/>
-        </p:xfrm>
-        <a:graphic>
-          <a:graphicData uri="http://schemas.openxmlformats.org/drawingml/2006/table">
-            <a:tbl>
-              <a:tblPr firstRow="1" bandRow="1">
-                <a:tableStyleId>{21E4AEA4-8DFA-4A89-87EB-49C32662AFE0}</a:tableStyleId>
-              </a:tblPr>
-              <a:tblGrid>
-                <a:gridCol w="1717110">
-                  <a:extLst>
-                    <a:ext uri="{9D8B030D-6E8A-4147-A177-3AD203B41FA5}">
-                      <a16:colId xmlns:a16="http://schemas.microsoft.com/office/drawing/2014/main" val="4182014441"/>
-                    </a:ext>
-                  </a:extLst>
-                </a:gridCol>
-                <a:gridCol w="5976462">
-                  <a:extLst>
-                    <a:ext uri="{9D8B030D-6E8A-4147-A177-3AD203B41FA5}">
-                      <a16:colId xmlns:a16="http://schemas.microsoft.com/office/drawing/2014/main" val="906180283"/>
-                    </a:ext>
-                  </a:extLst>
-                </a:gridCol>
-                <a:gridCol w="3026979">
-                  <a:extLst>
-                    <a:ext uri="{9D8B030D-6E8A-4147-A177-3AD203B41FA5}">
-                      <a16:colId xmlns:a16="http://schemas.microsoft.com/office/drawing/2014/main" val="2769721792"/>
-                    </a:ext>
-                  </a:extLst>
-                </a:gridCol>
-              </a:tblGrid>
-              <a:tr h="370840">
-                <a:tc>
-                  <a:txBody>
-                    <a:bodyPr/>
-                    <a:lstStyle/>
-                    <a:p>
-                      <a:r>
-                        <a:rPr lang="en-US" dirty="0"/>
-                        <a:t>Time</a:t>
-                      </a:r>
-                    </a:p>
-                  </a:txBody>
-                  <a:tcPr/>
-                </a:tc>
-                <a:tc>
-                  <a:txBody>
-                    <a:bodyPr/>
-                    <a:lstStyle/>
-                    <a:p>
-                      <a:r>
-                        <a:rPr lang="en-US" dirty="0"/>
-                        <a:t>Description</a:t>
-                      </a:r>
-                    </a:p>
-                  </a:txBody>
-                  <a:tcPr/>
-                </a:tc>
-                <a:tc>
-                  <a:txBody>
-                    <a:bodyPr/>
-                    <a:lstStyle/>
-                    <a:p>
-                      <a:r>
-                        <a:rPr lang="en-US" dirty="0"/>
-                        <a:t>Discussant</a:t>
-                      </a:r>
-                    </a:p>
-                  </a:txBody>
-                  <a:tcPr/>
-                </a:tc>
-                <a:extLst>
-                  <a:ext uri="{0D108BD9-81ED-4DB2-BD59-A6C34878D82A}">
-                    <a16:rowId xmlns:a16="http://schemas.microsoft.com/office/drawing/2014/main" val="1700444250"/>
-                  </a:ext>
-                </a:extLst>
-              </a:tr>
-              <a:tr h="370840">
-                <a:tc>
-                  <a:txBody>
-                    <a:bodyPr/>
-                    <a:lstStyle/>
-                    <a:p>
-                      <a:r>
-                        <a:rPr lang="en-US" dirty="0"/>
-                        <a:t>[15 min]</a:t>
-                      </a:r>
-                    </a:p>
-                  </a:txBody>
-                  <a:tcPr/>
-                </a:tc>
-                <a:tc>
-                  <a:txBody>
-                    <a:bodyPr/>
-                    <a:lstStyle/>
-                    <a:p>
-                      <a:r>
-                        <a:rPr lang="en-US" sz="1800" kern="1200" dirty="0">
-                          <a:solidFill>
-                            <a:schemeClr val="dk1"/>
-                          </a:solidFill>
-                          <a:effectLst/>
-                          <a:latin typeface="+mn-lt"/>
-                          <a:ea typeface="+mn-ea"/>
-                          <a:cs typeface="+mn-cs"/>
-                        </a:rPr>
-                        <a:t>(0) Introductions and administrivia </a:t>
-                      </a:r>
-                      <a:endParaRPr lang="en-US" dirty="0"/>
-                    </a:p>
-                  </a:txBody>
-                  <a:tcPr/>
-                </a:tc>
-                <a:tc>
-                  <a:txBody>
-                    <a:bodyPr/>
-                    <a:lstStyle/>
-                    <a:p>
-                      <a:r>
-                        <a:rPr lang="en-US" dirty="0" err="1"/>
-                        <a:t>Trikalinos</a:t>
-                      </a:r>
-                      <a:endParaRPr lang="en-US" dirty="0"/>
-                    </a:p>
-                  </a:txBody>
-                  <a:tcPr/>
-                </a:tc>
-                <a:extLst>
-                  <a:ext uri="{0D108BD9-81ED-4DB2-BD59-A6C34878D82A}">
-                    <a16:rowId xmlns:a16="http://schemas.microsoft.com/office/drawing/2014/main" val="2490995723"/>
-                  </a:ext>
-                </a:extLst>
-              </a:tr>
-              <a:tr h="370840">
-                <a:tc>
-                  <a:txBody>
-                    <a:bodyPr/>
-                    <a:lstStyle/>
-                    <a:p>
-                      <a:r>
-                        <a:rPr lang="en-US" dirty="0"/>
-                        <a:t>[25 min]</a:t>
-                      </a:r>
-                    </a:p>
-                  </a:txBody>
-                  <a:tcPr/>
-                </a:tc>
-                <a:tc>
-                  <a:txBody>
-                    <a:bodyPr/>
-                    <a:lstStyle/>
-                    <a:p>
-                      <a:r>
-                        <a:rPr lang="en-US" sz="1800" kern="1200" dirty="0">
-                          <a:solidFill>
-                            <a:schemeClr val="dk1"/>
-                          </a:solidFill>
-                          <a:effectLst/>
-                          <a:latin typeface="+mn-lt"/>
-                          <a:ea typeface="+mn-ea"/>
-                          <a:cs typeface="+mn-cs"/>
-                        </a:rPr>
-                        <a:t>(1) DES as a composition of point processes</a:t>
-                      </a:r>
-                    </a:p>
-                  </a:txBody>
-                  <a:tcPr/>
-                </a:tc>
-                <a:tc>
-                  <a:txBody>
-                    <a:bodyPr/>
-                    <a:lstStyle/>
-                    <a:p>
-                      <a:r>
-                        <a:rPr lang="en-US" dirty="0" err="1"/>
-                        <a:t>Alarid</a:t>
-                      </a:r>
-                      <a:r>
-                        <a:rPr lang="en-US" dirty="0"/>
-                        <a:t>-Escudero</a:t>
-                      </a:r>
-                    </a:p>
-                  </a:txBody>
-                  <a:tcPr/>
-                </a:tc>
-                <a:extLst>
-                  <a:ext uri="{0D108BD9-81ED-4DB2-BD59-A6C34878D82A}">
-                    <a16:rowId xmlns:a16="http://schemas.microsoft.com/office/drawing/2014/main" val="2065491183"/>
-                  </a:ext>
-                </a:extLst>
-              </a:tr>
-              <a:tr h="370840">
-                <a:tc>
-                  <a:txBody>
-                    <a:bodyPr/>
-                    <a:lstStyle/>
-                    <a:p>
-                      <a:r>
-                        <a:rPr lang="en-US" dirty="0"/>
-                        <a:t>[30 min]</a:t>
-                      </a:r>
-                    </a:p>
-                  </a:txBody>
-                  <a:tcPr/>
-                </a:tc>
-                <a:tc>
-                  <a:txBody>
-                    <a:bodyPr/>
-                    <a:lstStyle/>
-                    <a:p>
-                      <a:pPr marL="0" marR="0" lvl="0" indent="0" algn="l" defTabSz="914400" rtl="0" eaLnBrk="1" fontAlgn="auto" latinLnBrk="0" hangingPunct="1">
-                        <a:lnSpc>
-                          <a:spcPct val="100000"/>
-                        </a:lnSpc>
-                        <a:spcBef>
-                          <a:spcPts val="0"/>
-                        </a:spcBef>
-                        <a:spcAft>
-                          <a:spcPts val="0"/>
-                        </a:spcAft>
-                        <a:buClrTx/>
-                        <a:buSzTx/>
-                        <a:buFontTx/>
-                        <a:buNone/>
-                        <a:tabLst/>
-                        <a:defRPr/>
-                      </a:pPr>
-                      <a:r>
-                        <a:rPr lang="en-US" sz="1800" kern="1200" dirty="0">
-                          <a:solidFill>
-                            <a:schemeClr val="dk1"/>
-                          </a:solidFill>
-                          <a:effectLst/>
-                          <a:latin typeface="+mn-lt"/>
-                          <a:ea typeface="+mn-ea"/>
-                          <a:cs typeface="+mn-cs"/>
-                        </a:rPr>
-                        <a:t>(2) NHPPPs – key properties</a:t>
-                      </a:r>
-                    </a:p>
-                  </a:txBody>
-                  <a:tcPr/>
-                </a:tc>
-                <a:tc>
-                  <a:txBody>
-                    <a:bodyPr/>
-                    <a:lstStyle/>
-                    <a:p>
-                      <a:r>
-                        <a:rPr lang="en-US" dirty="0" err="1"/>
-                        <a:t>Trikalinos</a:t>
-                      </a:r>
-                      <a:endParaRPr lang="en-US" dirty="0"/>
-                    </a:p>
-                  </a:txBody>
-                  <a:tcPr/>
-                </a:tc>
-                <a:extLst>
-                  <a:ext uri="{0D108BD9-81ED-4DB2-BD59-A6C34878D82A}">
-                    <a16:rowId xmlns:a16="http://schemas.microsoft.com/office/drawing/2014/main" val="2757944147"/>
-                  </a:ext>
-                </a:extLst>
-              </a:tr>
-              <a:tr h="370840">
-                <a:tc>
-                  <a:txBody>
-                    <a:bodyPr/>
-                    <a:lstStyle/>
-                    <a:p>
-                      <a:r>
-                        <a:rPr lang="en-US" dirty="0"/>
-                        <a:t>[30 min]</a:t>
-                      </a:r>
-                    </a:p>
-                  </a:txBody>
-                  <a:tcPr/>
-                </a:tc>
-                <a:tc>
-                  <a:txBody>
-                    <a:bodyPr/>
-                    <a:lstStyle/>
-                    <a:p>
-                      <a:r>
-                        <a:rPr lang="en-US" sz="1800" kern="1200" dirty="0">
-                          <a:solidFill>
-                            <a:schemeClr val="dk1"/>
-                          </a:solidFill>
-                          <a:effectLst/>
-                          <a:latin typeface="+mn-lt"/>
-                          <a:ea typeface="+mn-ea"/>
-                          <a:cs typeface="+mn-cs"/>
-                        </a:rPr>
-                        <a:t>(3) Sampling from NHPPPs</a:t>
-                      </a:r>
-                      <a:endParaRPr lang="en-US" dirty="0"/>
-                    </a:p>
-                  </a:txBody>
-                  <a:tcPr/>
-                </a:tc>
-                <a:tc>
-                  <a:txBody>
-                    <a:bodyPr/>
-                    <a:lstStyle/>
-                    <a:p>
-                      <a:r>
-                        <a:rPr lang="en-US" dirty="0" err="1"/>
-                        <a:t>Sereda</a:t>
-                      </a:r>
-                      <a:endParaRPr lang="en-US" dirty="0"/>
-                    </a:p>
-                  </a:txBody>
-                  <a:tcPr/>
-                </a:tc>
-                <a:extLst>
-                  <a:ext uri="{0D108BD9-81ED-4DB2-BD59-A6C34878D82A}">
-                    <a16:rowId xmlns:a16="http://schemas.microsoft.com/office/drawing/2014/main" val="1442363784"/>
-                  </a:ext>
-                </a:extLst>
-              </a:tr>
-              <a:tr h="370840">
-                <a:tc>
-                  <a:txBody>
-                    <a:bodyPr/>
-                    <a:lstStyle/>
-                    <a:p>
-                      <a:r>
-                        <a:rPr lang="en-US" dirty="0"/>
-                        <a:t>[15 min]</a:t>
-                      </a:r>
-                    </a:p>
-                  </a:txBody>
-                  <a:tcPr/>
-                </a:tc>
-                <a:tc>
-                  <a:txBody>
-                    <a:bodyPr/>
-                    <a:lstStyle/>
-                    <a:p>
-                      <a:pPr marL="0" marR="0" lvl="0" indent="0" algn="l" defTabSz="914400" rtl="0" eaLnBrk="1" fontAlgn="auto" latinLnBrk="0" hangingPunct="1">
-                        <a:lnSpc>
-                          <a:spcPct val="100000"/>
-                        </a:lnSpc>
-                        <a:spcBef>
-                          <a:spcPts val="0"/>
-                        </a:spcBef>
-                        <a:spcAft>
-                          <a:spcPts val="0"/>
-                        </a:spcAft>
-                        <a:buClrTx/>
-                        <a:buSzTx/>
-                        <a:buFontTx/>
-                        <a:buNone/>
-                        <a:tabLst/>
-                        <a:defRPr/>
-                      </a:pPr>
-                      <a:r>
-                        <a:rPr lang="en-US" b="1" dirty="0"/>
-                        <a:t>Break</a:t>
-                      </a:r>
-                    </a:p>
-                  </a:txBody>
-                  <a:tcPr/>
-                </a:tc>
-                <a:tc>
-                  <a:txBody>
-                    <a:bodyPr/>
-                    <a:lstStyle/>
-                    <a:p>
-                      <a:endParaRPr lang="en-US" dirty="0"/>
-                    </a:p>
-                  </a:txBody>
-                  <a:tcPr/>
-                </a:tc>
-                <a:extLst>
-                  <a:ext uri="{0D108BD9-81ED-4DB2-BD59-A6C34878D82A}">
-                    <a16:rowId xmlns:a16="http://schemas.microsoft.com/office/drawing/2014/main" val="1269228105"/>
-                  </a:ext>
-                </a:extLst>
-              </a:tr>
-              <a:tr h="370840">
-                <a:tc>
-                  <a:txBody>
-                    <a:bodyPr/>
-                    <a:lstStyle/>
-                    <a:p>
-                      <a:r>
-                        <a:rPr lang="en-US" dirty="0"/>
-                        <a:t>[80 min]</a:t>
-                      </a:r>
-                    </a:p>
-                  </a:txBody>
-                  <a:tcPr/>
-                </a:tc>
-                <a:tc>
-                  <a:txBody>
-                    <a:bodyPr/>
-                    <a:lstStyle/>
-                    <a:p>
-                      <a:r>
-                        <a:rPr lang="en-US" sz="1800" kern="1200" dirty="0">
-                          <a:solidFill>
-                            <a:schemeClr val="dk1"/>
-                          </a:solidFill>
-                          <a:effectLst/>
-                          <a:latin typeface="+mn-lt"/>
-                          <a:ea typeface="+mn-ea"/>
-                          <a:cs typeface="+mn-cs"/>
-                        </a:rPr>
-                        <a:t>(4) Guided exercise: </a:t>
-                      </a:r>
-                    </a:p>
-                    <a:p>
-                      <a:pPr marL="285750" indent="-285750">
-                        <a:buFontTx/>
-                        <a:buChar char="-"/>
-                      </a:pPr>
-                      <a:r>
-                        <a:rPr lang="en-US" sz="1800" kern="1200" dirty="0">
-                          <a:solidFill>
-                            <a:schemeClr val="dk1"/>
-                          </a:solidFill>
-                          <a:effectLst/>
-                          <a:latin typeface="+mn-lt"/>
-                          <a:ea typeface="+mn-ea"/>
-                          <a:cs typeface="+mn-cs"/>
-                        </a:rPr>
-                        <a:t>Implement a simple cancer natural history DES for one person</a:t>
-                      </a:r>
-                    </a:p>
-                    <a:p>
-                      <a:pPr marL="285750" indent="-285750">
-                        <a:buFontTx/>
-                        <a:buChar char="-"/>
-                      </a:pPr>
-                      <a:r>
-                        <a:rPr lang="en-US" sz="1800" kern="1200" dirty="0">
-                          <a:solidFill>
-                            <a:schemeClr val="dk1"/>
-                          </a:solidFill>
-                          <a:effectLst/>
-                          <a:latin typeface="+mn-lt"/>
-                          <a:ea typeface="+mn-ea"/>
-                          <a:cs typeface="+mn-cs"/>
-                        </a:rPr>
-                        <a:t>The many-person case</a:t>
-                      </a:r>
-                    </a:p>
-                    <a:p>
-                      <a:pPr marL="285750" indent="-285750">
-                        <a:buFontTx/>
-                        <a:buChar char="-"/>
-                      </a:pPr>
-                      <a:r>
-                        <a:rPr lang="en-US" sz="1800" kern="1200" dirty="0">
-                          <a:solidFill>
-                            <a:schemeClr val="dk1"/>
-                          </a:solidFill>
-                          <a:effectLst/>
-                          <a:latin typeface="+mn-lt"/>
-                          <a:ea typeface="+mn-ea"/>
-                          <a:cs typeface="+mn-cs"/>
-                        </a:rPr>
-                        <a:t>Packaging </a:t>
-                      </a:r>
-                    </a:p>
-                  </a:txBody>
-                  <a:tcPr/>
-                </a:tc>
-                <a:tc>
-                  <a:txBody>
-                    <a:bodyPr/>
-                    <a:lstStyle/>
-                    <a:p>
-                      <a:r>
-                        <a:rPr lang="en-US" dirty="0"/>
-                        <a:t>[All]</a:t>
-                      </a:r>
-                    </a:p>
-                    <a:p>
-                      <a:r>
-                        <a:rPr lang="en-US" dirty="0" err="1"/>
-                        <a:t>Chrysanthopoulou</a:t>
-                      </a:r>
-                      <a:endParaRPr lang="en-US" dirty="0"/>
-                    </a:p>
-                    <a:p>
-                      <a:endParaRPr lang="en-US" dirty="0"/>
-                    </a:p>
-                    <a:p>
-                      <a:r>
-                        <a:rPr lang="en-US" dirty="0" err="1"/>
-                        <a:t>Sereda</a:t>
-                      </a:r>
-                      <a:r>
-                        <a:rPr lang="en-US" dirty="0"/>
-                        <a:t>/</a:t>
-                      </a:r>
-                      <a:r>
-                        <a:rPr lang="en-US" dirty="0" err="1"/>
-                        <a:t>Alarid</a:t>
-                      </a:r>
-                      <a:r>
-                        <a:rPr lang="en-US" dirty="0"/>
-                        <a:t>-Escudero</a:t>
-                      </a:r>
-                    </a:p>
-                    <a:p>
-                      <a:r>
-                        <a:rPr lang="en-US" dirty="0" err="1"/>
-                        <a:t>Trikalinos</a:t>
-                      </a:r>
-                      <a:endParaRPr lang="en-US" dirty="0"/>
-                    </a:p>
-                  </a:txBody>
-                  <a:tcPr/>
-                </a:tc>
-                <a:extLst>
-                  <a:ext uri="{0D108BD9-81ED-4DB2-BD59-A6C34878D82A}">
-                    <a16:rowId xmlns:a16="http://schemas.microsoft.com/office/drawing/2014/main" val="1448491104"/>
-                  </a:ext>
-                </a:extLst>
-              </a:tr>
-              <a:tr h="370840">
-                <a:tc>
-                  <a:txBody>
-                    <a:bodyPr/>
-                    <a:lstStyle/>
-                    <a:p>
-                      <a:r>
-                        <a:rPr lang="en-US" dirty="0"/>
-                        <a:t>[10 min]</a:t>
-                      </a:r>
-                    </a:p>
-                  </a:txBody>
-                  <a:tcPr/>
-                </a:tc>
-                <a:tc>
-                  <a:txBody>
-                    <a:bodyPr/>
-                    <a:lstStyle/>
-                    <a:p>
-                      <a:pPr marL="0" marR="0" lvl="0" indent="0" algn="l" defTabSz="914400" rtl="0" eaLnBrk="1" fontAlgn="auto" latinLnBrk="0" hangingPunct="1">
-                        <a:lnSpc>
-                          <a:spcPct val="100000"/>
-                        </a:lnSpc>
-                        <a:spcBef>
-                          <a:spcPts val="0"/>
-                        </a:spcBef>
-                        <a:spcAft>
-                          <a:spcPts val="0"/>
-                        </a:spcAft>
-                        <a:buClrTx/>
-                        <a:buSzTx/>
-                        <a:buFontTx/>
-                        <a:buNone/>
-                        <a:tabLst/>
-                        <a:defRPr/>
-                      </a:pPr>
-                      <a:r>
-                        <a:rPr lang="en-US" sz="1800" kern="1200" dirty="0">
-                          <a:solidFill>
-                            <a:schemeClr val="dk1"/>
-                          </a:solidFill>
-                          <a:effectLst/>
-                          <a:latin typeface="+mn-lt"/>
-                          <a:ea typeface="+mn-ea"/>
-                          <a:cs typeface="+mn-cs"/>
-                        </a:rPr>
-                        <a:t>(5) Advanced Topic Teaser on self-excitatory processes: point processes that are not NHPPPs and when you may need them</a:t>
-                      </a:r>
-                    </a:p>
-                  </a:txBody>
-                  <a:tcPr/>
-                </a:tc>
-                <a:tc>
-                  <a:txBody>
-                    <a:bodyPr/>
-                    <a:lstStyle/>
-                    <a:p>
-                      <a:r>
-                        <a:rPr lang="en-US" dirty="0" err="1"/>
-                        <a:t>Trikalinos</a:t>
-                      </a:r>
-                      <a:endParaRPr lang="en-US" dirty="0"/>
-                    </a:p>
-                  </a:txBody>
-                  <a:tcPr/>
-                </a:tc>
-                <a:extLst>
-                  <a:ext uri="{0D108BD9-81ED-4DB2-BD59-A6C34878D82A}">
-                    <a16:rowId xmlns:a16="http://schemas.microsoft.com/office/drawing/2014/main" val="3766472740"/>
-                  </a:ext>
-                </a:extLst>
-              </a:tr>
-              <a:tr h="370840">
-                <a:tc>
-                  <a:txBody>
-                    <a:bodyPr/>
-                    <a:lstStyle/>
-                    <a:p>
-                      <a:r>
-                        <a:rPr lang="en-US" dirty="0"/>
-                        <a:t>[15 min]</a:t>
-                      </a:r>
-                    </a:p>
-                  </a:txBody>
-                  <a:tcPr/>
-                </a:tc>
-                <a:tc>
-                  <a:txBody>
-                    <a:bodyPr/>
-                    <a:lstStyle/>
-                    <a:p>
-                      <a:r>
-                        <a:rPr lang="en-US" dirty="0"/>
-                        <a:t>General Q &amp; A</a:t>
-                      </a:r>
-                    </a:p>
-                  </a:txBody>
-                  <a:tcPr/>
-                </a:tc>
-                <a:tc>
-                  <a:txBody>
-                    <a:bodyPr/>
-                    <a:lstStyle/>
-                    <a:p>
-                      <a:r>
-                        <a:rPr lang="en-US" dirty="0"/>
-                        <a:t>All</a:t>
-                      </a:r>
-                    </a:p>
-                  </a:txBody>
-                  <a:tcPr/>
-                </a:tc>
-                <a:extLst>
-                  <a:ext uri="{0D108BD9-81ED-4DB2-BD59-A6C34878D82A}">
-                    <a16:rowId xmlns:a16="http://schemas.microsoft.com/office/drawing/2014/main" val="3034331301"/>
-                  </a:ext>
-                </a:extLst>
-              </a:tr>
-            </a:tbl>
-          </a:graphicData>
-        </a:graphic>
-      </p:graphicFrame>
       <p:sp>
         <p:nvSpPr>
           <p:cNvPr id="5" name="Right Arrow 4">
@@ -4521,12 +3859,1437 @@
           </a:p>
         </p:txBody>
       </p:sp>
+      <mc:AlternateContent xmlns:mc="http://schemas.openxmlformats.org/markup-compatibility/2006" xmlns:a14="http://schemas.microsoft.com/office/drawing/2010/main">
+        <mc:Choice Requires="a14">
+          <p:graphicFrame>
+            <p:nvGraphicFramePr>
+              <p:cNvPr id="7" name="Content Placeholder 3">
+                <a:extLst>
+                  <a:ext uri="{FF2B5EF4-FFF2-40B4-BE49-F238E27FC236}">
+                    <a16:creationId xmlns:a16="http://schemas.microsoft.com/office/drawing/2014/main" id="{157A7C49-AD5B-2ECD-96A0-407AC3C76B7E}"/>
+                  </a:ext>
+                </a:extLst>
+              </p:cNvPr>
+              <p:cNvGraphicFramePr>
+                <a:graphicFrameLocks/>
+              </p:cNvGraphicFramePr>
+              <p:nvPr>
+                <p:extLst>
+                  <p:ext uri="{D42A27DB-BD31-4B8C-83A1-F6EECF244321}">
+                    <p14:modId xmlns:p14="http://schemas.microsoft.com/office/powerpoint/2010/main" val="260976388"/>
+                  </p:ext>
+                </p:extLst>
+              </p:nvPr>
+            </p:nvGraphicFramePr>
+            <p:xfrm>
+              <a:off x="1208690" y="942340"/>
+              <a:ext cx="10720551" cy="4699000"/>
+            </p:xfrm>
+            <a:graphic>
+              <a:graphicData uri="http://schemas.openxmlformats.org/drawingml/2006/table">
+                <a:tbl>
+                  <a:tblPr firstRow="1" bandRow="1">
+                    <a:tableStyleId>{21E4AEA4-8DFA-4A89-87EB-49C32662AFE0}</a:tableStyleId>
+                  </a:tblPr>
+                  <a:tblGrid>
+                    <a:gridCol w="1717110">
+                      <a:extLst>
+                        <a:ext uri="{9D8B030D-6E8A-4147-A177-3AD203B41FA5}">
+                          <a16:colId xmlns:a16="http://schemas.microsoft.com/office/drawing/2014/main" val="4182014441"/>
+                        </a:ext>
+                      </a:extLst>
+                    </a:gridCol>
+                    <a:gridCol w="5976462">
+                      <a:extLst>
+                        <a:ext uri="{9D8B030D-6E8A-4147-A177-3AD203B41FA5}">
+                          <a16:colId xmlns:a16="http://schemas.microsoft.com/office/drawing/2014/main" val="906180283"/>
+                        </a:ext>
+                      </a:extLst>
+                    </a:gridCol>
+                    <a:gridCol w="3026979">
+                      <a:extLst>
+                        <a:ext uri="{9D8B030D-6E8A-4147-A177-3AD203B41FA5}">
+                          <a16:colId xmlns:a16="http://schemas.microsoft.com/office/drawing/2014/main" val="2769721792"/>
+                        </a:ext>
+                      </a:extLst>
+                    </a:gridCol>
+                  </a:tblGrid>
+                  <a:tr h="370840">
+                    <a:tc>
+                      <a:txBody>
+                        <a:bodyPr/>
+                        <a:lstStyle/>
+                        <a:p>
+                          <a:r>
+                            <a:rPr lang="en-US" dirty="0"/>
+                            <a:t>Time</a:t>
+                          </a:r>
+                        </a:p>
+                      </a:txBody>
+                      <a:tcPr/>
+                    </a:tc>
+                    <a:tc>
+                      <a:txBody>
+                        <a:bodyPr/>
+                        <a:lstStyle/>
+                        <a:p>
+                          <a:r>
+                            <a:rPr lang="en-US" dirty="0"/>
+                            <a:t>Description</a:t>
+                          </a:r>
+                        </a:p>
+                      </a:txBody>
+                      <a:tcPr/>
+                    </a:tc>
+                    <a:tc>
+                      <a:txBody>
+                        <a:bodyPr/>
+                        <a:lstStyle/>
+                        <a:p>
+                          <a:r>
+                            <a:rPr lang="en-US" dirty="0"/>
+                            <a:t>Discussant</a:t>
+                          </a:r>
+                        </a:p>
+                      </a:txBody>
+                      <a:tcPr/>
+                    </a:tc>
+                    <a:extLst>
+                      <a:ext uri="{0D108BD9-81ED-4DB2-BD59-A6C34878D82A}">
+                        <a16:rowId xmlns:a16="http://schemas.microsoft.com/office/drawing/2014/main" val="1700444250"/>
+                      </a:ext>
+                    </a:extLst>
+                  </a:tr>
+                  <a:tr h="370840">
+                    <a:tc>
+                      <a:txBody>
+                        <a:bodyPr/>
+                        <a:lstStyle/>
+                        <a:p>
+                          <a:r>
+                            <a:rPr lang="en-US" dirty="0"/>
+                            <a:t>[15 min]</a:t>
+                          </a:r>
+                        </a:p>
+                      </a:txBody>
+                      <a:tcPr/>
+                    </a:tc>
+                    <a:tc>
+                      <a:txBody>
+                        <a:bodyPr/>
+                        <a:lstStyle/>
+                        <a:p>
+                          <a:r>
+                            <a:rPr lang="en-US" sz="1800" kern="1200" dirty="0">
+                              <a:solidFill>
+                                <a:schemeClr val="dk1"/>
+                              </a:solidFill>
+                              <a:effectLst/>
+                              <a:latin typeface="+mn-lt"/>
+                              <a:ea typeface="+mn-ea"/>
+                              <a:cs typeface="+mn-cs"/>
+                            </a:rPr>
+                            <a:t>(0) Introductions and administrivia </a:t>
+                          </a:r>
+                          <a:endParaRPr lang="en-US" dirty="0"/>
+                        </a:p>
+                      </a:txBody>
+                      <a:tcPr/>
+                    </a:tc>
+                    <a:tc>
+                      <a:txBody>
+                        <a:bodyPr/>
+                        <a:lstStyle/>
+                        <a:p>
+                          <a:r>
+                            <a:rPr lang="en-US" dirty="0" err="1"/>
+                            <a:t>Trikalinos</a:t>
+                          </a:r>
+                          <a:endParaRPr lang="en-US" dirty="0"/>
+                        </a:p>
+                      </a:txBody>
+                      <a:tcPr/>
+                    </a:tc>
+                    <a:extLst>
+                      <a:ext uri="{0D108BD9-81ED-4DB2-BD59-A6C34878D82A}">
+                        <a16:rowId xmlns:a16="http://schemas.microsoft.com/office/drawing/2014/main" val="2490995723"/>
+                      </a:ext>
+                    </a:extLst>
+                  </a:tr>
+                  <a:tr h="370840">
+                    <a:tc>
+                      <a:txBody>
+                        <a:bodyPr/>
+                        <a:lstStyle/>
+                        <a:p>
+                          <a:r>
+                            <a:rPr lang="en-US" dirty="0"/>
+                            <a:t>[25 min]</a:t>
+                          </a:r>
+                        </a:p>
+                      </a:txBody>
+                      <a:tcPr/>
+                    </a:tc>
+                    <a:tc>
+                      <a:txBody>
+                        <a:bodyPr/>
+                        <a:lstStyle/>
+                        <a:p>
+                          <a:r>
+                            <a:rPr lang="en-US" sz="1800" kern="1200" dirty="0">
+                              <a:solidFill>
+                                <a:schemeClr val="dk1"/>
+                              </a:solidFill>
+                              <a:effectLst/>
+                              <a:latin typeface="+mn-lt"/>
+                              <a:ea typeface="+mn-ea"/>
+                              <a:cs typeface="+mn-cs"/>
+                            </a:rPr>
+                            <a:t>(1) DES as a composition of point processes</a:t>
+                          </a:r>
+                        </a:p>
+                      </a:txBody>
+                      <a:tcPr/>
+                    </a:tc>
+                    <a:tc>
+                      <a:txBody>
+                        <a:bodyPr/>
+                        <a:lstStyle/>
+                        <a:p>
+                          <a:r>
+                            <a:rPr lang="en-US" dirty="0" err="1"/>
+                            <a:t>Alarid</a:t>
+                          </a:r>
+                          <a:r>
+                            <a:rPr lang="en-US" dirty="0"/>
+                            <a:t>-Escudero</a:t>
+                          </a:r>
+                        </a:p>
+                      </a:txBody>
+                      <a:tcPr/>
+                    </a:tc>
+                    <a:extLst>
+                      <a:ext uri="{0D108BD9-81ED-4DB2-BD59-A6C34878D82A}">
+                        <a16:rowId xmlns:a16="http://schemas.microsoft.com/office/drawing/2014/main" val="2065491183"/>
+                      </a:ext>
+                    </a:extLst>
+                  </a:tr>
+                  <a:tr h="370840">
+                    <a:tc>
+                      <a:txBody>
+                        <a:bodyPr/>
+                        <a:lstStyle/>
+                        <a:p>
+                          <a:r>
+                            <a:rPr lang="en-US" dirty="0"/>
+                            <a:t>[30 min]</a:t>
+                          </a:r>
+                        </a:p>
+                      </a:txBody>
+                      <a:tcPr/>
+                    </a:tc>
+                    <a:tc>
+                      <a:txBody>
+                        <a:bodyPr/>
+                        <a:lstStyle/>
+                        <a:p>
+                          <a:pPr marL="0" marR="0" lvl="0" indent="0" algn="l" defTabSz="914400" rtl="0" eaLnBrk="1" fontAlgn="auto" latinLnBrk="0" hangingPunct="1">
+                            <a:lnSpc>
+                              <a:spcPct val="100000"/>
+                            </a:lnSpc>
+                            <a:spcBef>
+                              <a:spcPts val="0"/>
+                            </a:spcBef>
+                            <a:spcAft>
+                              <a:spcPts val="0"/>
+                            </a:spcAft>
+                            <a:buClrTx/>
+                            <a:buSzTx/>
+                            <a:buFontTx/>
+                            <a:buNone/>
+                            <a:tabLst/>
+                            <a:defRPr/>
+                          </a:pPr>
+                          <a:r>
+                            <a:rPr lang="en-US" sz="1800" kern="1200" dirty="0">
+                              <a:solidFill>
+                                <a:schemeClr val="dk1"/>
+                              </a:solidFill>
+                              <a:effectLst/>
+                              <a:latin typeface="+mn-lt"/>
+                              <a:ea typeface="+mn-ea"/>
+                              <a:cs typeface="+mn-cs"/>
+                            </a:rPr>
+                            <a:t>(2) NHPPPs – key properties</a:t>
+                          </a:r>
+                        </a:p>
+                      </a:txBody>
+                      <a:tcPr/>
+                    </a:tc>
+                    <a:tc>
+                      <a:txBody>
+                        <a:bodyPr/>
+                        <a:lstStyle/>
+                        <a:p>
+                          <a:r>
+                            <a:rPr lang="en-US" dirty="0" err="1"/>
+                            <a:t>Trikalinos</a:t>
+                          </a:r>
+                          <a:endParaRPr lang="en-US" dirty="0"/>
+                        </a:p>
+                      </a:txBody>
+                      <a:tcPr/>
+                    </a:tc>
+                    <a:extLst>
+                      <a:ext uri="{0D108BD9-81ED-4DB2-BD59-A6C34878D82A}">
+                        <a16:rowId xmlns:a16="http://schemas.microsoft.com/office/drawing/2014/main" val="2757944147"/>
+                      </a:ext>
+                    </a:extLst>
+                  </a:tr>
+                  <a:tr h="370840">
+                    <a:tc>
+                      <a:txBody>
+                        <a:bodyPr/>
+                        <a:lstStyle/>
+                        <a:p>
+                          <a:r>
+                            <a:rPr lang="en-US" dirty="0"/>
+                            <a:t>[30 min]</a:t>
+                          </a:r>
+                        </a:p>
+                      </a:txBody>
+                      <a:tcPr/>
+                    </a:tc>
+                    <a:tc>
+                      <a:txBody>
+                        <a:bodyPr/>
+                        <a:lstStyle/>
+                        <a:p>
+                          <a:r>
+                            <a:rPr lang="en-US" sz="1800" kern="1200" dirty="0">
+                              <a:solidFill>
+                                <a:schemeClr val="dk1"/>
+                              </a:solidFill>
+                              <a:effectLst/>
+                              <a:latin typeface="+mn-lt"/>
+                              <a:ea typeface="+mn-ea"/>
+                              <a:cs typeface="+mn-cs"/>
+                            </a:rPr>
+                            <a:t>(3) Sampling from NHPPPs</a:t>
+                          </a:r>
+                          <a:endParaRPr lang="en-US" dirty="0"/>
+                        </a:p>
+                      </a:txBody>
+                      <a:tcPr/>
+                    </a:tc>
+                    <a:tc>
+                      <a:txBody>
+                        <a:bodyPr/>
+                        <a:lstStyle/>
+                        <a:p>
+                          <a:pPr marL="0" marR="0" lvl="0" indent="0" algn="l" defTabSz="914400" rtl="0" eaLnBrk="1" fontAlgn="auto" latinLnBrk="0" hangingPunct="1">
+                            <a:lnSpc>
+                              <a:spcPct val="100000"/>
+                            </a:lnSpc>
+                            <a:spcBef>
+                              <a:spcPts val="0"/>
+                            </a:spcBef>
+                            <a:spcAft>
+                              <a:spcPts val="0"/>
+                            </a:spcAft>
+                            <a:buClrTx/>
+                            <a:buSzTx/>
+                            <a:buFontTx/>
+                            <a:buNone/>
+                            <a:tabLst/>
+                            <a:defRPr/>
+                          </a:pPr>
+                          <a:r>
+                            <a:rPr lang="en-US" dirty="0"/>
+                            <a:t>Trikalinos</a:t>
+                          </a:r>
+                        </a:p>
+                      </a:txBody>
+                      <a:tcPr/>
+                    </a:tc>
+                    <a:extLst>
+                      <a:ext uri="{0D108BD9-81ED-4DB2-BD59-A6C34878D82A}">
+                        <a16:rowId xmlns:a16="http://schemas.microsoft.com/office/drawing/2014/main" val="1442363784"/>
+                      </a:ext>
+                    </a:extLst>
+                  </a:tr>
+                  <a:tr h="370840">
+                    <a:tc>
+                      <a:txBody>
+                        <a:bodyPr/>
+                        <a:lstStyle/>
+                        <a:p>
+                          <a:r>
+                            <a:rPr lang="en-US" dirty="0"/>
+                            <a:t>[15 min]</a:t>
+                          </a:r>
+                        </a:p>
+                      </a:txBody>
+                      <a:tcPr/>
+                    </a:tc>
+                    <a:tc>
+                      <a:txBody>
+                        <a:bodyPr/>
+                        <a:lstStyle/>
+                        <a:p>
+                          <a:pPr marL="0" marR="0" lvl="0" indent="0" algn="l" defTabSz="914400" rtl="0" eaLnBrk="1" fontAlgn="auto" latinLnBrk="0" hangingPunct="1">
+                            <a:lnSpc>
+                              <a:spcPct val="100000"/>
+                            </a:lnSpc>
+                            <a:spcBef>
+                              <a:spcPts val="0"/>
+                            </a:spcBef>
+                            <a:spcAft>
+                              <a:spcPts val="0"/>
+                            </a:spcAft>
+                            <a:buClrTx/>
+                            <a:buSzTx/>
+                            <a:buFontTx/>
+                            <a:buNone/>
+                            <a:tabLst/>
+                            <a:defRPr/>
+                          </a:pPr>
+                          <a:r>
+                            <a:rPr lang="en-US" b="1" dirty="0"/>
+                            <a:t>Break</a:t>
+                          </a:r>
+                        </a:p>
+                      </a:txBody>
+                      <a:tcPr/>
+                    </a:tc>
+                    <a:tc>
+                      <a:txBody>
+                        <a:bodyPr/>
+                        <a:lstStyle/>
+                        <a:p>
+                          <a:endParaRPr lang="en-US" dirty="0"/>
+                        </a:p>
+                      </a:txBody>
+                      <a:tcPr/>
+                    </a:tc>
+                    <a:extLst>
+                      <a:ext uri="{0D108BD9-81ED-4DB2-BD59-A6C34878D82A}">
+                        <a16:rowId xmlns:a16="http://schemas.microsoft.com/office/drawing/2014/main" val="1269228105"/>
+                      </a:ext>
+                    </a:extLst>
+                  </a:tr>
+                  <a:tr h="370840">
+                    <a:tc>
+                      <a:txBody>
+                        <a:bodyPr/>
+                        <a:lstStyle/>
+                        <a:p>
+                          <a:r>
+                            <a:rPr lang="en-US" dirty="0"/>
+                            <a:t>[80 min]</a:t>
+                          </a:r>
+                        </a:p>
+                      </a:txBody>
+                      <a:tcPr/>
+                    </a:tc>
+                    <a:tc>
+                      <a:txBody>
+                        <a:bodyPr/>
+                        <a:lstStyle/>
+                        <a:p>
+                          <a:r>
+                            <a:rPr lang="en-US" sz="1800" kern="1200" dirty="0">
+                              <a:solidFill>
+                                <a:schemeClr val="dk1"/>
+                              </a:solidFill>
+                              <a:effectLst/>
+                              <a:latin typeface="+mn-lt"/>
+                              <a:ea typeface="+mn-ea"/>
+                              <a:cs typeface="+mn-cs"/>
+                            </a:rPr>
+                            <a:t>(4) Working with code</a:t>
+                          </a:r>
+                        </a:p>
+                        <a:p>
+                          <a:r>
+                            <a:rPr lang="en-US" sz="1800" kern="1200" dirty="0">
+                              <a:solidFill>
+                                <a:schemeClr val="dk1"/>
+                              </a:solidFill>
+                              <a:effectLst/>
+                              <a:latin typeface="+mn-lt"/>
+                              <a:ea typeface="+mn-ea"/>
+                              <a:cs typeface="+mn-cs"/>
+                            </a:rPr>
+                            <a:t>-- Base </a:t>
+                          </a:r>
+                          <a:r>
+                            <a:rPr lang="en-US" sz="1800" kern="1200" dirty="0">
+                              <a:solidFill>
+                                <a:schemeClr val="dk1"/>
+                              </a:solidFill>
+                              <a:effectLst/>
+                              <a:latin typeface="Courier New" panose="02070309020205020404" pitchFamily="49" charset="0"/>
+                              <a:ea typeface="+mn-ea"/>
+                              <a:cs typeface="Courier New" panose="02070309020205020404" pitchFamily="49" charset="0"/>
+                            </a:rPr>
+                            <a:t>R</a:t>
+                          </a:r>
+                          <a:r>
+                            <a:rPr lang="en-US" sz="1800" kern="1200" dirty="0">
+                              <a:solidFill>
+                                <a:schemeClr val="dk1"/>
+                              </a:solidFill>
+                              <a:effectLst/>
+                              <a:latin typeface="+mn-lt"/>
+                              <a:ea typeface="+mn-ea"/>
+                              <a:cs typeface="+mn-cs"/>
+                            </a:rPr>
+                            <a:t> vs </a:t>
+                          </a:r>
+                          <a:r>
+                            <a:rPr lang="en-US" sz="1800" kern="1200" dirty="0" err="1">
+                              <a:solidFill>
+                                <a:schemeClr val="dk1"/>
+                              </a:solidFill>
+                              <a:effectLst/>
+                              <a:latin typeface="Courier New" panose="02070309020205020404" pitchFamily="49" charset="0"/>
+                              <a:ea typeface="+mn-ea"/>
+                              <a:cs typeface="Courier New" panose="02070309020205020404" pitchFamily="49" charset="0"/>
+                            </a:rPr>
+                            <a:t>nhppp</a:t>
+                          </a:r>
+                          <a:r>
+                            <a:rPr lang="en-US" sz="1800" kern="1200" dirty="0">
+                              <a:solidFill>
+                                <a:schemeClr val="dk1"/>
+                              </a:solidFill>
+                              <a:effectLst/>
+                              <a:latin typeface="+mn-lt"/>
+                              <a:ea typeface="+mn-ea"/>
+                              <a:cs typeface="+mn-cs"/>
+                            </a:rPr>
+                            <a:t>:  Simulate first vs all events in </a:t>
+                          </a:r>
+                          <a14:m>
+                            <m:oMath xmlns:m="http://schemas.openxmlformats.org/officeDocument/2006/math">
+                              <m:r>
+                                <a:rPr lang="en-US" sz="1800" b="0" i="1" kern="1200" smtClean="0">
+                                  <a:solidFill>
+                                    <a:schemeClr val="dk1"/>
+                                  </a:solidFill>
+                                  <a:effectLst/>
+                                  <a:latin typeface="Cambria Math" panose="02040503050406030204" pitchFamily="18" charset="0"/>
+                                  <a:ea typeface="+mn-ea"/>
+                                  <a:cs typeface="+mn-cs"/>
+                                </a:rPr>
+                                <m:t>(</m:t>
+                              </m:r>
+                              <m:r>
+                                <m:rPr>
+                                  <m:sty m:val="p"/>
+                                </m:rPr>
+                                <a:rPr lang="en-US" sz="1800" b="0" i="1" kern="1200" smtClean="0">
+                                  <a:solidFill>
+                                    <a:schemeClr val="dk1"/>
+                                  </a:solidFill>
+                                  <a:effectLst/>
+                                  <a:latin typeface="Cambria Math" panose="02040503050406030204" pitchFamily="18" charset="0"/>
+                                  <a:ea typeface="+mn-ea"/>
+                                  <a:cs typeface="+mn-cs"/>
+                                </a:rPr>
+                                <m:t>a</m:t>
+                              </m:r>
+                              <m:r>
+                                <a:rPr lang="en-US" sz="1800" b="0" i="1" kern="1200" smtClean="0">
+                                  <a:solidFill>
+                                    <a:schemeClr val="dk1"/>
+                                  </a:solidFill>
+                                  <a:effectLst/>
+                                  <a:latin typeface="Cambria Math" panose="02040503050406030204" pitchFamily="18" charset="0"/>
+                                  <a:ea typeface="+mn-ea"/>
+                                  <a:cs typeface="+mn-cs"/>
+                                </a:rPr>
+                                <m:t>,</m:t>
+                              </m:r>
+                              <m:r>
+                                <m:rPr>
+                                  <m:sty m:val="p"/>
+                                </m:rPr>
+                                <a:rPr lang="en-US" sz="1800" b="0" i="1" kern="1200" smtClean="0">
+                                  <a:solidFill>
+                                    <a:schemeClr val="dk1"/>
+                                  </a:solidFill>
+                                  <a:effectLst/>
+                                  <a:latin typeface="Cambria Math" panose="02040503050406030204" pitchFamily="18" charset="0"/>
+                                  <a:ea typeface="+mn-ea"/>
+                                  <a:cs typeface="+mn-cs"/>
+                                </a:rPr>
+                                <m:t>b</m:t>
+                              </m:r>
+                              <m:r>
+                                <a:rPr lang="en-US" sz="1800" b="0" i="1" kern="1200" smtClean="0">
+                                  <a:solidFill>
+                                    <a:schemeClr val="dk1"/>
+                                  </a:solidFill>
+                                  <a:effectLst/>
+                                  <a:latin typeface="Cambria Math" panose="02040503050406030204" pitchFamily="18" charset="0"/>
+                                  <a:ea typeface="+mn-ea"/>
+                                  <a:cs typeface="+mn-cs"/>
+                                </a:rPr>
+                                <m:t>]</m:t>
+                              </m:r>
+                            </m:oMath>
+                          </a14:m>
+                          <a:endParaRPr lang="en-US" sz="1800" kern="1200" dirty="0">
+                            <a:solidFill>
+                              <a:schemeClr val="dk1"/>
+                            </a:solidFill>
+                            <a:effectLst/>
+                            <a:latin typeface="+mn-lt"/>
+                            <a:ea typeface="+mn-ea"/>
+                            <a:cs typeface="+mn-cs"/>
+                          </a:endParaRPr>
+                        </a:p>
+                        <a:p>
+                          <a:r>
+                            <a:rPr lang="en-US" sz="1800" kern="1200" dirty="0">
+                              <a:solidFill>
+                                <a:schemeClr val="dk1"/>
+                              </a:solidFill>
+                              <a:effectLst/>
+                              <a:latin typeface="+mn-lt"/>
+                              <a:ea typeface="+mn-ea"/>
+                              <a:cs typeface="+mn-cs"/>
+                            </a:rPr>
+                            <a:t>-- Packaging a simple cancer DES </a:t>
+                          </a:r>
+                        </a:p>
+                        <a:p>
+                          <a:r>
+                            <a:rPr lang="en-US" sz="1800" kern="1200" dirty="0">
+                              <a:solidFill>
+                                <a:schemeClr val="dk1"/>
+                              </a:solidFill>
+                              <a:effectLst/>
+                              <a:latin typeface="+mn-lt"/>
+                              <a:ea typeface="+mn-ea"/>
+                              <a:cs typeface="+mn-cs"/>
+                            </a:rPr>
+                            <a:t>-- The vectorized case </a:t>
+                          </a:r>
+                        </a:p>
+                      </a:txBody>
+                      <a:tcPr/>
+                    </a:tc>
+                    <a:tc>
+                      <a:txBody>
+                        <a:bodyPr/>
+                        <a:lstStyle/>
+                        <a:p>
+                          <a:r>
+                            <a:rPr lang="en-US" dirty="0"/>
+                            <a:t>[All]</a:t>
+                          </a:r>
+                        </a:p>
+                        <a:p>
+                          <a:r>
+                            <a:rPr lang="en-US" dirty="0"/>
+                            <a:t>Trikalinos</a:t>
+                          </a:r>
+                        </a:p>
+                        <a:p>
+                          <a:r>
+                            <a:rPr lang="en-US" dirty="0"/>
+                            <a:t>Sereda</a:t>
+                          </a:r>
+                        </a:p>
+                        <a:p>
+                          <a:pPr marL="0" marR="0" lvl="0" indent="0" algn="l" defTabSz="914400" rtl="0" eaLnBrk="1" fontAlgn="auto" latinLnBrk="0" hangingPunct="1">
+                            <a:lnSpc>
+                              <a:spcPct val="100000"/>
+                            </a:lnSpc>
+                            <a:spcBef>
+                              <a:spcPts val="0"/>
+                            </a:spcBef>
+                            <a:spcAft>
+                              <a:spcPts val="0"/>
+                            </a:spcAft>
+                            <a:buClrTx/>
+                            <a:buSzTx/>
+                            <a:buFontTx/>
+                            <a:buNone/>
+                            <a:tabLst/>
+                            <a:defRPr/>
+                          </a:pPr>
+                          <a:r>
+                            <a:rPr lang="en-US" dirty="0"/>
+                            <a:t>Sereda</a:t>
+                          </a:r>
+                        </a:p>
+                      </a:txBody>
+                      <a:tcPr/>
+                    </a:tc>
+                    <a:extLst>
+                      <a:ext uri="{0D108BD9-81ED-4DB2-BD59-A6C34878D82A}">
+                        <a16:rowId xmlns:a16="http://schemas.microsoft.com/office/drawing/2014/main" val="1448491104"/>
+                      </a:ext>
+                    </a:extLst>
+                  </a:tr>
+                  <a:tr h="370840">
+                    <a:tc>
+                      <a:txBody>
+                        <a:bodyPr/>
+                        <a:lstStyle/>
+                        <a:p>
+                          <a:r>
+                            <a:rPr lang="en-US" dirty="0"/>
+                            <a:t>[5 min]</a:t>
+                          </a:r>
+                        </a:p>
+                      </a:txBody>
+                      <a:tcPr/>
+                    </a:tc>
+                    <a:tc>
+                      <a:txBody>
+                        <a:bodyPr/>
+                        <a:lstStyle/>
+                        <a:p>
+                          <a:pPr marL="0" marR="0" lvl="0" indent="0" algn="l" defTabSz="914400" rtl="0" eaLnBrk="1" fontAlgn="auto" latinLnBrk="0" hangingPunct="1">
+                            <a:lnSpc>
+                              <a:spcPct val="100000"/>
+                            </a:lnSpc>
+                            <a:spcBef>
+                              <a:spcPts val="0"/>
+                            </a:spcBef>
+                            <a:spcAft>
+                              <a:spcPts val="0"/>
+                            </a:spcAft>
+                            <a:buClrTx/>
+                            <a:buSzTx/>
+                            <a:buFontTx/>
+                            <a:buNone/>
+                            <a:tabLst/>
+                            <a:defRPr/>
+                          </a:pPr>
+                          <a:r>
+                            <a:rPr lang="en-US" sz="1800" kern="1200" dirty="0">
+                              <a:solidFill>
+                                <a:schemeClr val="dk1"/>
+                              </a:solidFill>
+                              <a:effectLst/>
+                              <a:latin typeface="+mn-lt"/>
+                              <a:ea typeface="+mn-ea"/>
+                              <a:cs typeface="+mn-cs"/>
+                            </a:rPr>
+                            <a:t>(5) Advanced Topic Teaser on self-excitatory processes: point processes that are not NHPPPs and when you may need them</a:t>
+                          </a:r>
+                        </a:p>
+                      </a:txBody>
+                      <a:tcPr/>
+                    </a:tc>
+                    <a:tc>
+                      <a:txBody>
+                        <a:bodyPr/>
+                        <a:lstStyle/>
+                        <a:p>
+                          <a:r>
+                            <a:rPr lang="en-US" dirty="0"/>
+                            <a:t>Trikalinos</a:t>
+                          </a:r>
+                        </a:p>
+                      </a:txBody>
+                      <a:tcPr/>
+                    </a:tc>
+                    <a:extLst>
+                      <a:ext uri="{0D108BD9-81ED-4DB2-BD59-A6C34878D82A}">
+                        <a16:rowId xmlns:a16="http://schemas.microsoft.com/office/drawing/2014/main" val="3766472740"/>
+                      </a:ext>
+                    </a:extLst>
+                  </a:tr>
+                  <a:tr h="370840">
+                    <a:tc>
+                      <a:txBody>
+                        <a:bodyPr/>
+                        <a:lstStyle/>
+                        <a:p>
+                          <a:r>
+                            <a:rPr lang="en-US" dirty="0"/>
+                            <a:t>[15 min]</a:t>
+                          </a:r>
+                        </a:p>
+                      </a:txBody>
+                      <a:tcPr/>
+                    </a:tc>
+                    <a:tc>
+                      <a:txBody>
+                        <a:bodyPr/>
+                        <a:lstStyle/>
+                        <a:p>
+                          <a:r>
+                            <a:rPr lang="en-US" dirty="0"/>
+                            <a:t>General Q &amp; A</a:t>
+                          </a:r>
+                        </a:p>
+                      </a:txBody>
+                      <a:tcPr/>
+                    </a:tc>
+                    <a:tc>
+                      <a:txBody>
+                        <a:bodyPr/>
+                        <a:lstStyle/>
+                        <a:p>
+                          <a:r>
+                            <a:rPr lang="en-US" dirty="0"/>
+                            <a:t>All</a:t>
+                          </a:r>
+                        </a:p>
+                      </a:txBody>
+                      <a:tcPr/>
+                    </a:tc>
+                    <a:extLst>
+                      <a:ext uri="{0D108BD9-81ED-4DB2-BD59-A6C34878D82A}">
+                        <a16:rowId xmlns:a16="http://schemas.microsoft.com/office/drawing/2014/main" val="3034331301"/>
+                      </a:ext>
+                    </a:extLst>
+                  </a:tr>
+                </a:tbl>
+              </a:graphicData>
+            </a:graphic>
+          </p:graphicFrame>
+        </mc:Choice>
+        <mc:Fallback xmlns="">
+          <p:graphicFrame>
+            <p:nvGraphicFramePr>
+              <p:cNvPr id="7" name="Content Placeholder 3">
+                <a:extLst>
+                  <a:ext uri="{FF2B5EF4-FFF2-40B4-BE49-F238E27FC236}">
+                    <a16:creationId xmlns:a16="http://schemas.microsoft.com/office/drawing/2014/main" id="{157A7C49-AD5B-2ECD-96A0-407AC3C76B7E}"/>
+                  </a:ext>
+                </a:extLst>
+              </p:cNvPr>
+              <p:cNvGraphicFramePr>
+                <a:graphicFrameLocks/>
+              </p:cNvGraphicFramePr>
+              <p:nvPr>
+                <p:extLst>
+                  <p:ext uri="{D42A27DB-BD31-4B8C-83A1-F6EECF244321}">
+                    <p14:modId xmlns:p14="http://schemas.microsoft.com/office/powerpoint/2010/main" val="260976388"/>
+                  </p:ext>
+                </p:extLst>
+              </p:nvPr>
+            </p:nvGraphicFramePr>
+            <p:xfrm>
+              <a:off x="1208690" y="942340"/>
+              <a:ext cx="10720551" cy="4699000"/>
+            </p:xfrm>
+            <a:graphic>
+              <a:graphicData uri="http://schemas.openxmlformats.org/drawingml/2006/table">
+                <a:tbl>
+                  <a:tblPr firstRow="1" bandRow="1">
+                    <a:tableStyleId>{21E4AEA4-8DFA-4A89-87EB-49C32662AFE0}</a:tableStyleId>
+                  </a:tblPr>
+                  <a:tblGrid>
+                    <a:gridCol w="1717110">
+                      <a:extLst>
+                        <a:ext uri="{9D8B030D-6E8A-4147-A177-3AD203B41FA5}">
+                          <a16:colId xmlns:a16="http://schemas.microsoft.com/office/drawing/2014/main" val="4182014441"/>
+                        </a:ext>
+                      </a:extLst>
+                    </a:gridCol>
+                    <a:gridCol w="5976462">
+                      <a:extLst>
+                        <a:ext uri="{9D8B030D-6E8A-4147-A177-3AD203B41FA5}">
+                          <a16:colId xmlns:a16="http://schemas.microsoft.com/office/drawing/2014/main" val="906180283"/>
+                        </a:ext>
+                      </a:extLst>
+                    </a:gridCol>
+                    <a:gridCol w="3026979">
+                      <a:extLst>
+                        <a:ext uri="{9D8B030D-6E8A-4147-A177-3AD203B41FA5}">
+                          <a16:colId xmlns:a16="http://schemas.microsoft.com/office/drawing/2014/main" val="2769721792"/>
+                        </a:ext>
+                      </a:extLst>
+                    </a:gridCol>
+                  </a:tblGrid>
+                  <a:tr h="370840">
+                    <a:tc>
+                      <a:txBody>
+                        <a:bodyPr/>
+                        <a:lstStyle/>
+                        <a:p>
+                          <a:r>
+                            <a:rPr lang="en-US" dirty="0"/>
+                            <a:t>Time</a:t>
+                          </a:r>
+                        </a:p>
+                      </a:txBody>
+                      <a:tcPr/>
+                    </a:tc>
+                    <a:tc>
+                      <a:txBody>
+                        <a:bodyPr/>
+                        <a:lstStyle/>
+                        <a:p>
+                          <a:r>
+                            <a:rPr lang="en-US" dirty="0"/>
+                            <a:t>Description</a:t>
+                          </a:r>
+                        </a:p>
+                      </a:txBody>
+                      <a:tcPr/>
+                    </a:tc>
+                    <a:tc>
+                      <a:txBody>
+                        <a:bodyPr/>
+                        <a:lstStyle/>
+                        <a:p>
+                          <a:r>
+                            <a:rPr lang="en-US" dirty="0"/>
+                            <a:t>Discussant</a:t>
+                          </a:r>
+                        </a:p>
+                      </a:txBody>
+                      <a:tcPr/>
+                    </a:tc>
+                    <a:extLst>
+                      <a:ext uri="{0D108BD9-81ED-4DB2-BD59-A6C34878D82A}">
+                        <a16:rowId xmlns:a16="http://schemas.microsoft.com/office/drawing/2014/main" val="1700444250"/>
+                      </a:ext>
+                    </a:extLst>
+                  </a:tr>
+                  <a:tr h="370840">
+                    <a:tc>
+                      <a:txBody>
+                        <a:bodyPr/>
+                        <a:lstStyle/>
+                        <a:p>
+                          <a:r>
+                            <a:rPr lang="en-US" dirty="0"/>
+                            <a:t>[15 min]</a:t>
+                          </a:r>
+                        </a:p>
+                      </a:txBody>
+                      <a:tcPr/>
+                    </a:tc>
+                    <a:tc>
+                      <a:txBody>
+                        <a:bodyPr/>
+                        <a:lstStyle/>
+                        <a:p>
+                          <a:r>
+                            <a:rPr lang="en-US" sz="1800" kern="1200" dirty="0">
+                              <a:solidFill>
+                                <a:schemeClr val="dk1"/>
+                              </a:solidFill>
+                              <a:effectLst/>
+                              <a:latin typeface="+mn-lt"/>
+                              <a:ea typeface="+mn-ea"/>
+                              <a:cs typeface="+mn-cs"/>
+                            </a:rPr>
+                            <a:t>(0) Introductions and administrivia </a:t>
+                          </a:r>
+                          <a:endParaRPr lang="en-US" dirty="0"/>
+                        </a:p>
+                      </a:txBody>
+                      <a:tcPr/>
+                    </a:tc>
+                    <a:tc>
+                      <a:txBody>
+                        <a:bodyPr/>
+                        <a:lstStyle/>
+                        <a:p>
+                          <a:r>
+                            <a:rPr lang="en-US" dirty="0" err="1"/>
+                            <a:t>Trikalinos</a:t>
+                          </a:r>
+                          <a:endParaRPr lang="en-US" dirty="0"/>
+                        </a:p>
+                      </a:txBody>
+                      <a:tcPr/>
+                    </a:tc>
+                    <a:extLst>
+                      <a:ext uri="{0D108BD9-81ED-4DB2-BD59-A6C34878D82A}">
+                        <a16:rowId xmlns:a16="http://schemas.microsoft.com/office/drawing/2014/main" val="2490995723"/>
+                      </a:ext>
+                    </a:extLst>
+                  </a:tr>
+                  <a:tr h="370840">
+                    <a:tc>
+                      <a:txBody>
+                        <a:bodyPr/>
+                        <a:lstStyle/>
+                        <a:p>
+                          <a:r>
+                            <a:rPr lang="en-US" dirty="0"/>
+                            <a:t>[25 min]</a:t>
+                          </a:r>
+                        </a:p>
+                      </a:txBody>
+                      <a:tcPr/>
+                    </a:tc>
+                    <a:tc>
+                      <a:txBody>
+                        <a:bodyPr/>
+                        <a:lstStyle/>
+                        <a:p>
+                          <a:r>
+                            <a:rPr lang="en-US" sz="1800" kern="1200" dirty="0">
+                              <a:solidFill>
+                                <a:schemeClr val="dk1"/>
+                              </a:solidFill>
+                              <a:effectLst/>
+                              <a:latin typeface="+mn-lt"/>
+                              <a:ea typeface="+mn-ea"/>
+                              <a:cs typeface="+mn-cs"/>
+                            </a:rPr>
+                            <a:t>(1) DES as a composition of point processes</a:t>
+                          </a:r>
+                        </a:p>
+                      </a:txBody>
+                      <a:tcPr/>
+                    </a:tc>
+                    <a:tc>
+                      <a:txBody>
+                        <a:bodyPr/>
+                        <a:lstStyle/>
+                        <a:p>
+                          <a:r>
+                            <a:rPr lang="en-US" dirty="0" err="1"/>
+                            <a:t>Alarid</a:t>
+                          </a:r>
+                          <a:r>
+                            <a:rPr lang="en-US" dirty="0"/>
+                            <a:t>-Escudero</a:t>
+                          </a:r>
+                        </a:p>
+                      </a:txBody>
+                      <a:tcPr/>
+                    </a:tc>
+                    <a:extLst>
+                      <a:ext uri="{0D108BD9-81ED-4DB2-BD59-A6C34878D82A}">
+                        <a16:rowId xmlns:a16="http://schemas.microsoft.com/office/drawing/2014/main" val="2065491183"/>
+                      </a:ext>
+                    </a:extLst>
+                  </a:tr>
+                  <a:tr h="370840">
+                    <a:tc>
+                      <a:txBody>
+                        <a:bodyPr/>
+                        <a:lstStyle/>
+                        <a:p>
+                          <a:r>
+                            <a:rPr lang="en-US" dirty="0"/>
+                            <a:t>[30 min]</a:t>
+                          </a:r>
+                        </a:p>
+                      </a:txBody>
+                      <a:tcPr/>
+                    </a:tc>
+                    <a:tc>
+                      <a:txBody>
+                        <a:bodyPr/>
+                        <a:lstStyle/>
+                        <a:p>
+                          <a:pPr marL="0" marR="0" lvl="0" indent="0" algn="l" defTabSz="914400" rtl="0" eaLnBrk="1" fontAlgn="auto" latinLnBrk="0" hangingPunct="1">
+                            <a:lnSpc>
+                              <a:spcPct val="100000"/>
+                            </a:lnSpc>
+                            <a:spcBef>
+                              <a:spcPts val="0"/>
+                            </a:spcBef>
+                            <a:spcAft>
+                              <a:spcPts val="0"/>
+                            </a:spcAft>
+                            <a:buClrTx/>
+                            <a:buSzTx/>
+                            <a:buFontTx/>
+                            <a:buNone/>
+                            <a:tabLst/>
+                            <a:defRPr/>
+                          </a:pPr>
+                          <a:r>
+                            <a:rPr lang="en-US" sz="1800" kern="1200" dirty="0">
+                              <a:solidFill>
+                                <a:schemeClr val="dk1"/>
+                              </a:solidFill>
+                              <a:effectLst/>
+                              <a:latin typeface="+mn-lt"/>
+                              <a:ea typeface="+mn-ea"/>
+                              <a:cs typeface="+mn-cs"/>
+                            </a:rPr>
+                            <a:t>(2) NHPPPs – key properties</a:t>
+                          </a:r>
+                        </a:p>
+                      </a:txBody>
+                      <a:tcPr/>
+                    </a:tc>
+                    <a:tc>
+                      <a:txBody>
+                        <a:bodyPr/>
+                        <a:lstStyle/>
+                        <a:p>
+                          <a:r>
+                            <a:rPr lang="en-US" dirty="0" err="1"/>
+                            <a:t>Trikalinos</a:t>
+                          </a:r>
+                          <a:endParaRPr lang="en-US" dirty="0"/>
+                        </a:p>
+                      </a:txBody>
+                      <a:tcPr/>
+                    </a:tc>
+                    <a:extLst>
+                      <a:ext uri="{0D108BD9-81ED-4DB2-BD59-A6C34878D82A}">
+                        <a16:rowId xmlns:a16="http://schemas.microsoft.com/office/drawing/2014/main" val="2757944147"/>
+                      </a:ext>
+                    </a:extLst>
+                  </a:tr>
+                  <a:tr h="370840">
+                    <a:tc>
+                      <a:txBody>
+                        <a:bodyPr/>
+                        <a:lstStyle/>
+                        <a:p>
+                          <a:r>
+                            <a:rPr lang="en-US" dirty="0"/>
+                            <a:t>[30 min]</a:t>
+                          </a:r>
+                        </a:p>
+                      </a:txBody>
+                      <a:tcPr/>
+                    </a:tc>
+                    <a:tc>
+                      <a:txBody>
+                        <a:bodyPr/>
+                        <a:lstStyle/>
+                        <a:p>
+                          <a:r>
+                            <a:rPr lang="en-US" sz="1800" kern="1200" dirty="0">
+                              <a:solidFill>
+                                <a:schemeClr val="dk1"/>
+                              </a:solidFill>
+                              <a:effectLst/>
+                              <a:latin typeface="+mn-lt"/>
+                              <a:ea typeface="+mn-ea"/>
+                              <a:cs typeface="+mn-cs"/>
+                            </a:rPr>
+                            <a:t>(3) Sampling from NHPPPs</a:t>
+                          </a:r>
+                          <a:endParaRPr lang="en-US" dirty="0"/>
+                        </a:p>
+                      </a:txBody>
+                      <a:tcPr/>
+                    </a:tc>
+                    <a:tc>
+                      <a:txBody>
+                        <a:bodyPr/>
+                        <a:lstStyle/>
+                        <a:p>
+                          <a:pPr marL="0" marR="0" lvl="0" indent="0" algn="l" defTabSz="914400" rtl="0" eaLnBrk="1" fontAlgn="auto" latinLnBrk="0" hangingPunct="1">
+                            <a:lnSpc>
+                              <a:spcPct val="100000"/>
+                            </a:lnSpc>
+                            <a:spcBef>
+                              <a:spcPts val="0"/>
+                            </a:spcBef>
+                            <a:spcAft>
+                              <a:spcPts val="0"/>
+                            </a:spcAft>
+                            <a:buClrTx/>
+                            <a:buSzTx/>
+                            <a:buFontTx/>
+                            <a:buNone/>
+                            <a:tabLst/>
+                            <a:defRPr/>
+                          </a:pPr>
+                          <a:r>
+                            <a:rPr lang="en-US" dirty="0"/>
+                            <a:t>Trikalinos</a:t>
+                          </a:r>
+                        </a:p>
+                      </a:txBody>
+                      <a:tcPr/>
+                    </a:tc>
+                    <a:extLst>
+                      <a:ext uri="{0D108BD9-81ED-4DB2-BD59-A6C34878D82A}">
+                        <a16:rowId xmlns:a16="http://schemas.microsoft.com/office/drawing/2014/main" val="1442363784"/>
+                      </a:ext>
+                    </a:extLst>
+                  </a:tr>
+                  <a:tr h="370840">
+                    <a:tc>
+                      <a:txBody>
+                        <a:bodyPr/>
+                        <a:lstStyle/>
+                        <a:p>
+                          <a:r>
+                            <a:rPr lang="en-US" dirty="0"/>
+                            <a:t>[15 min]</a:t>
+                          </a:r>
+                        </a:p>
+                      </a:txBody>
+                      <a:tcPr/>
+                    </a:tc>
+                    <a:tc>
+                      <a:txBody>
+                        <a:bodyPr/>
+                        <a:lstStyle/>
+                        <a:p>
+                          <a:pPr marL="0" marR="0" lvl="0" indent="0" algn="l" defTabSz="914400" rtl="0" eaLnBrk="1" fontAlgn="auto" latinLnBrk="0" hangingPunct="1">
+                            <a:lnSpc>
+                              <a:spcPct val="100000"/>
+                            </a:lnSpc>
+                            <a:spcBef>
+                              <a:spcPts val="0"/>
+                            </a:spcBef>
+                            <a:spcAft>
+                              <a:spcPts val="0"/>
+                            </a:spcAft>
+                            <a:buClrTx/>
+                            <a:buSzTx/>
+                            <a:buFontTx/>
+                            <a:buNone/>
+                            <a:tabLst/>
+                            <a:defRPr/>
+                          </a:pPr>
+                          <a:r>
+                            <a:rPr lang="en-US" b="1" dirty="0"/>
+                            <a:t>Break</a:t>
+                          </a:r>
+                        </a:p>
+                      </a:txBody>
+                      <a:tcPr/>
+                    </a:tc>
+                    <a:tc>
+                      <a:txBody>
+                        <a:bodyPr/>
+                        <a:lstStyle/>
+                        <a:p>
+                          <a:endParaRPr lang="en-US" dirty="0"/>
+                        </a:p>
+                      </a:txBody>
+                      <a:tcPr/>
+                    </a:tc>
+                    <a:extLst>
+                      <a:ext uri="{0D108BD9-81ED-4DB2-BD59-A6C34878D82A}">
+                        <a16:rowId xmlns:a16="http://schemas.microsoft.com/office/drawing/2014/main" val="1269228105"/>
+                      </a:ext>
+                    </a:extLst>
+                  </a:tr>
+                  <a:tr h="1188720">
+                    <a:tc>
+                      <a:txBody>
+                        <a:bodyPr/>
+                        <a:lstStyle/>
+                        <a:p>
+                          <a:r>
+                            <a:rPr lang="en-US" dirty="0"/>
+                            <a:t>[80 min]</a:t>
+                          </a:r>
+                        </a:p>
+                      </a:txBody>
+                      <a:tcPr/>
+                    </a:tc>
+                    <a:tc>
+                      <a:txBody>
+                        <a:bodyPr/>
+                        <a:lstStyle/>
+                        <a:p>
+                          <a:endParaRPr lang="en-US"/>
+                        </a:p>
+                      </a:txBody>
+                      <a:tcPr>
+                        <a:blipFill>
+                          <a:blip r:embed="rId2"/>
+                          <a:stretch>
+                            <a:fillRect l="-28875" t="-189362" r="-51168" b="-114894"/>
+                          </a:stretch>
+                        </a:blipFill>
+                      </a:tcPr>
+                    </a:tc>
+                    <a:tc>
+                      <a:txBody>
+                        <a:bodyPr/>
+                        <a:lstStyle/>
+                        <a:p>
+                          <a:r>
+                            <a:rPr lang="en-US" dirty="0"/>
+                            <a:t>[All]</a:t>
+                          </a:r>
+                        </a:p>
+                        <a:p>
+                          <a:r>
+                            <a:rPr lang="en-US" dirty="0"/>
+                            <a:t>Trikalinos</a:t>
+                          </a:r>
+                        </a:p>
+                        <a:p>
+                          <a:r>
+                            <a:rPr lang="en-US" dirty="0"/>
+                            <a:t>Sereda</a:t>
+                          </a:r>
+                        </a:p>
+                        <a:p>
+                          <a:pPr marL="0" marR="0" lvl="0" indent="0" algn="l" defTabSz="914400" rtl="0" eaLnBrk="1" fontAlgn="auto" latinLnBrk="0" hangingPunct="1">
+                            <a:lnSpc>
+                              <a:spcPct val="100000"/>
+                            </a:lnSpc>
+                            <a:spcBef>
+                              <a:spcPts val="0"/>
+                            </a:spcBef>
+                            <a:spcAft>
+                              <a:spcPts val="0"/>
+                            </a:spcAft>
+                            <a:buClrTx/>
+                            <a:buSzTx/>
+                            <a:buFontTx/>
+                            <a:buNone/>
+                            <a:tabLst/>
+                            <a:defRPr/>
+                          </a:pPr>
+                          <a:r>
+                            <a:rPr lang="en-US" dirty="0"/>
+                            <a:t>Sereda</a:t>
+                          </a:r>
+                        </a:p>
+                      </a:txBody>
+                      <a:tcPr/>
+                    </a:tc>
+                    <a:extLst>
+                      <a:ext uri="{0D108BD9-81ED-4DB2-BD59-A6C34878D82A}">
+                        <a16:rowId xmlns:a16="http://schemas.microsoft.com/office/drawing/2014/main" val="1448491104"/>
+                      </a:ext>
+                    </a:extLst>
+                  </a:tr>
+                  <a:tr h="914400">
+                    <a:tc>
+                      <a:txBody>
+                        <a:bodyPr/>
+                        <a:lstStyle/>
+                        <a:p>
+                          <a:r>
+                            <a:rPr lang="en-US" dirty="0"/>
+                            <a:t>[5 min]</a:t>
+                          </a:r>
+                        </a:p>
+                      </a:txBody>
+                      <a:tcPr/>
+                    </a:tc>
+                    <a:tc>
+                      <a:txBody>
+                        <a:bodyPr/>
+                        <a:lstStyle/>
+                        <a:p>
+                          <a:pPr marL="0" marR="0" lvl="0" indent="0" algn="l" defTabSz="914400" rtl="0" eaLnBrk="1" fontAlgn="auto" latinLnBrk="0" hangingPunct="1">
+                            <a:lnSpc>
+                              <a:spcPct val="100000"/>
+                            </a:lnSpc>
+                            <a:spcBef>
+                              <a:spcPts val="0"/>
+                            </a:spcBef>
+                            <a:spcAft>
+                              <a:spcPts val="0"/>
+                            </a:spcAft>
+                            <a:buClrTx/>
+                            <a:buSzTx/>
+                            <a:buFontTx/>
+                            <a:buNone/>
+                            <a:tabLst/>
+                            <a:defRPr/>
+                          </a:pPr>
+                          <a:r>
+                            <a:rPr lang="en-US" sz="1800" kern="1200" dirty="0">
+                              <a:solidFill>
+                                <a:schemeClr val="dk1"/>
+                              </a:solidFill>
+                              <a:effectLst/>
+                              <a:latin typeface="+mn-lt"/>
+                              <a:ea typeface="+mn-ea"/>
+                              <a:cs typeface="+mn-cs"/>
+                            </a:rPr>
+                            <a:t>(5) Advanced Topic Teaser on self-excitatory processes: point processes that are not NHPPPs and when you may need them</a:t>
+                          </a:r>
+                        </a:p>
+                      </a:txBody>
+                      <a:tcPr/>
+                    </a:tc>
+                    <a:tc>
+                      <a:txBody>
+                        <a:bodyPr/>
+                        <a:lstStyle/>
+                        <a:p>
+                          <a:r>
+                            <a:rPr lang="en-US" dirty="0"/>
+                            <a:t>Trikalinos</a:t>
+                          </a:r>
+                        </a:p>
+                      </a:txBody>
+                      <a:tcPr/>
+                    </a:tc>
+                    <a:extLst>
+                      <a:ext uri="{0D108BD9-81ED-4DB2-BD59-A6C34878D82A}">
+                        <a16:rowId xmlns:a16="http://schemas.microsoft.com/office/drawing/2014/main" val="3766472740"/>
+                      </a:ext>
+                    </a:extLst>
+                  </a:tr>
+                  <a:tr h="370840">
+                    <a:tc>
+                      <a:txBody>
+                        <a:bodyPr/>
+                        <a:lstStyle/>
+                        <a:p>
+                          <a:r>
+                            <a:rPr lang="en-US" dirty="0"/>
+                            <a:t>[15 min]</a:t>
+                          </a:r>
+                        </a:p>
+                      </a:txBody>
+                      <a:tcPr/>
+                    </a:tc>
+                    <a:tc>
+                      <a:txBody>
+                        <a:bodyPr/>
+                        <a:lstStyle/>
+                        <a:p>
+                          <a:r>
+                            <a:rPr lang="en-US" dirty="0"/>
+                            <a:t>General Q &amp; A</a:t>
+                          </a:r>
+                        </a:p>
+                      </a:txBody>
+                      <a:tcPr/>
+                    </a:tc>
+                    <a:tc>
+                      <a:txBody>
+                        <a:bodyPr/>
+                        <a:lstStyle/>
+                        <a:p>
+                          <a:r>
+                            <a:rPr lang="en-US" dirty="0"/>
+                            <a:t>All</a:t>
+                          </a:r>
+                        </a:p>
+                      </a:txBody>
+                      <a:tcPr/>
+                    </a:tc>
+                    <a:extLst>
+                      <a:ext uri="{0D108BD9-81ED-4DB2-BD59-A6C34878D82A}">
+                        <a16:rowId xmlns:a16="http://schemas.microsoft.com/office/drawing/2014/main" val="3034331301"/>
+                      </a:ext>
+                    </a:extLst>
+                  </a:tr>
+                </a:tbl>
+              </a:graphicData>
+            </a:graphic>
+          </p:graphicFrame>
+        </mc:Fallback>
+      </mc:AlternateContent>
       <p:sp>
         <p:nvSpPr>
-          <p:cNvPr id="3" name="TextBox 2">
+          <p:cNvPr id="8" name="TextBox 7">
             <a:extLst>
               <a:ext uri="{FF2B5EF4-FFF2-40B4-BE49-F238E27FC236}">
-                <a16:creationId xmlns:a16="http://schemas.microsoft.com/office/drawing/2014/main" id="{FCDF5CBB-7176-2BA9-2A1E-74FB39088729}"/>
+                <a16:creationId xmlns:a16="http://schemas.microsoft.com/office/drawing/2014/main" id="{B1F69214-E798-64E3-8358-8F2E33592AF8}"/>
               </a:ext>
             </a:extLst>
           </p:cNvPr>
@@ -4551,7 +5314,7 @@
           <a:p>
             <a:r>
               <a:rPr lang="en-US" sz="2400" dirty="0"/>
-              <a:t>Sunday 15</a:t>
+              <a:t>Sunday 28</a:t>
             </a:r>
             <a:r>
               <a:rPr lang="en-US" sz="2400" baseline="30000" dirty="0"/>
@@ -4559,7 +5322,17 @@
             </a:r>
             <a:r>
               <a:rPr lang="en-US" sz="2400" dirty="0"/>
-              <a:t> of June, 9:00 to 12:30</a:t>
+              <a:t> of June, 8:35 to 12:</a:t>
+            </a:r>
+            <a:r>
+              <a:rPr lang="en-US" sz="2400" dirty="0">
+                <a:sym typeface="Wingdings" pitchFamily="2" charset="2"/>
+              </a:rPr>
+              <a:t>0</a:t>
+            </a:r>
+            <a:r>
+              <a:rPr lang="en-US" sz="2400" dirty="0"/>
+              <a:t>0</a:t>
             </a:r>
           </a:p>
         </p:txBody>
@@ -14765,668 +15538,6 @@
           <a:chExt cx="0" cy="0"/>
         </a:xfrm>
       </p:grpSpPr>
-      <p:graphicFrame>
-        <p:nvGraphicFramePr>
-          <p:cNvPr id="4" name="Content Placeholder 3">
-            <a:extLst>
-              <a:ext uri="{FF2B5EF4-FFF2-40B4-BE49-F238E27FC236}">
-                <a16:creationId xmlns:a16="http://schemas.microsoft.com/office/drawing/2014/main" id="{6B849C42-1619-548A-DD8D-11A9FB1AE07A}"/>
-              </a:ext>
-            </a:extLst>
-          </p:cNvPr>
-          <p:cNvGraphicFramePr>
-            <a:graphicFrameLocks noGrp="1"/>
-          </p:cNvGraphicFramePr>
-          <p:nvPr>
-            <p:ph idx="1"/>
-          </p:nvPr>
-        </p:nvGraphicFramePr>
-        <p:xfrm>
-          <a:off x="1208690" y="942340"/>
-          <a:ext cx="10720551" cy="4973320"/>
-        </p:xfrm>
-        <a:graphic>
-          <a:graphicData uri="http://schemas.openxmlformats.org/drawingml/2006/table">
-            <a:tbl>
-              <a:tblPr firstRow="1" bandRow="1">
-                <a:tableStyleId>{21E4AEA4-8DFA-4A89-87EB-49C32662AFE0}</a:tableStyleId>
-              </a:tblPr>
-              <a:tblGrid>
-                <a:gridCol w="1717110">
-                  <a:extLst>
-                    <a:ext uri="{9D8B030D-6E8A-4147-A177-3AD203B41FA5}">
-                      <a16:colId xmlns:a16="http://schemas.microsoft.com/office/drawing/2014/main" val="4182014441"/>
-                    </a:ext>
-                  </a:extLst>
-                </a:gridCol>
-                <a:gridCol w="5976462">
-                  <a:extLst>
-                    <a:ext uri="{9D8B030D-6E8A-4147-A177-3AD203B41FA5}">
-                      <a16:colId xmlns:a16="http://schemas.microsoft.com/office/drawing/2014/main" val="906180283"/>
-                    </a:ext>
-                  </a:extLst>
-                </a:gridCol>
-                <a:gridCol w="3026979">
-                  <a:extLst>
-                    <a:ext uri="{9D8B030D-6E8A-4147-A177-3AD203B41FA5}">
-                      <a16:colId xmlns:a16="http://schemas.microsoft.com/office/drawing/2014/main" val="2769721792"/>
-                    </a:ext>
-                  </a:extLst>
-                </a:gridCol>
-              </a:tblGrid>
-              <a:tr h="370840">
-                <a:tc>
-                  <a:txBody>
-                    <a:bodyPr/>
-                    <a:lstStyle/>
-                    <a:p>
-                      <a:r>
-                        <a:rPr lang="en-US" dirty="0"/>
-                        <a:t>Time</a:t>
-                      </a:r>
-                    </a:p>
-                  </a:txBody>
-                  <a:tcPr/>
-                </a:tc>
-                <a:tc>
-                  <a:txBody>
-                    <a:bodyPr/>
-                    <a:lstStyle/>
-                    <a:p>
-                      <a:r>
-                        <a:rPr lang="en-US" dirty="0"/>
-                        <a:t>Description</a:t>
-                      </a:r>
-                    </a:p>
-                  </a:txBody>
-                  <a:tcPr/>
-                </a:tc>
-                <a:tc>
-                  <a:txBody>
-                    <a:bodyPr/>
-                    <a:lstStyle/>
-                    <a:p>
-                      <a:r>
-                        <a:rPr lang="en-US" dirty="0"/>
-                        <a:t>Discussant</a:t>
-                      </a:r>
-                    </a:p>
-                  </a:txBody>
-                  <a:tcPr/>
-                </a:tc>
-                <a:extLst>
-                  <a:ext uri="{0D108BD9-81ED-4DB2-BD59-A6C34878D82A}">
-                    <a16:rowId xmlns:a16="http://schemas.microsoft.com/office/drawing/2014/main" val="1700444250"/>
-                  </a:ext>
-                </a:extLst>
-              </a:tr>
-              <a:tr h="370840">
-                <a:tc>
-                  <a:txBody>
-                    <a:bodyPr/>
-                    <a:lstStyle/>
-                    <a:p>
-                      <a:r>
-                        <a:rPr lang="en-US" dirty="0"/>
-                        <a:t>[15 min]</a:t>
-                      </a:r>
-                    </a:p>
-                  </a:txBody>
-                  <a:tcPr/>
-                </a:tc>
-                <a:tc>
-                  <a:txBody>
-                    <a:bodyPr/>
-                    <a:lstStyle/>
-                    <a:p>
-                      <a:r>
-                        <a:rPr lang="en-US" sz="1800" kern="1200" dirty="0">
-                          <a:solidFill>
-                            <a:schemeClr val="dk1"/>
-                          </a:solidFill>
-                          <a:effectLst/>
-                          <a:latin typeface="+mn-lt"/>
-                          <a:ea typeface="+mn-ea"/>
-                          <a:cs typeface="+mn-cs"/>
-                        </a:rPr>
-                        <a:t>(0) Introductions and administrivia </a:t>
-                      </a:r>
-                      <a:endParaRPr lang="en-US" dirty="0"/>
-                    </a:p>
-                  </a:txBody>
-                  <a:tcPr/>
-                </a:tc>
-                <a:tc>
-                  <a:txBody>
-                    <a:bodyPr/>
-                    <a:lstStyle/>
-                    <a:p>
-                      <a:r>
-                        <a:rPr lang="en-US" dirty="0" err="1"/>
-                        <a:t>Trikalinos</a:t>
-                      </a:r>
-                      <a:endParaRPr lang="en-US" dirty="0"/>
-                    </a:p>
-                  </a:txBody>
-                  <a:tcPr/>
-                </a:tc>
-                <a:extLst>
-                  <a:ext uri="{0D108BD9-81ED-4DB2-BD59-A6C34878D82A}">
-                    <a16:rowId xmlns:a16="http://schemas.microsoft.com/office/drawing/2014/main" val="2490995723"/>
-                  </a:ext>
-                </a:extLst>
-              </a:tr>
-              <a:tr h="370840">
-                <a:tc>
-                  <a:txBody>
-                    <a:bodyPr/>
-                    <a:lstStyle/>
-                    <a:p>
-                      <a:r>
-                        <a:rPr lang="en-US" dirty="0"/>
-                        <a:t>[25 min]</a:t>
-                      </a:r>
-                    </a:p>
-                  </a:txBody>
-                  <a:tcPr/>
-                </a:tc>
-                <a:tc>
-                  <a:txBody>
-                    <a:bodyPr/>
-                    <a:lstStyle/>
-                    <a:p>
-                      <a:r>
-                        <a:rPr lang="en-US" sz="1800" kern="1200" dirty="0">
-                          <a:solidFill>
-                            <a:schemeClr val="dk1"/>
-                          </a:solidFill>
-                          <a:effectLst/>
-                          <a:latin typeface="+mn-lt"/>
-                          <a:ea typeface="+mn-ea"/>
-                          <a:cs typeface="+mn-cs"/>
-                        </a:rPr>
-                        <a:t>(1) DES as a composition of point processes</a:t>
-                      </a:r>
-                    </a:p>
-                  </a:txBody>
-                  <a:tcPr/>
-                </a:tc>
-                <a:tc>
-                  <a:txBody>
-                    <a:bodyPr/>
-                    <a:lstStyle/>
-                    <a:p>
-                      <a:r>
-                        <a:rPr lang="en-US" dirty="0" err="1"/>
-                        <a:t>Alarid</a:t>
-                      </a:r>
-                      <a:r>
-                        <a:rPr lang="en-US" dirty="0"/>
-                        <a:t>-Escudero</a:t>
-                      </a:r>
-                    </a:p>
-                  </a:txBody>
-                  <a:tcPr/>
-                </a:tc>
-                <a:extLst>
-                  <a:ext uri="{0D108BD9-81ED-4DB2-BD59-A6C34878D82A}">
-                    <a16:rowId xmlns:a16="http://schemas.microsoft.com/office/drawing/2014/main" val="2065491183"/>
-                  </a:ext>
-                </a:extLst>
-              </a:tr>
-              <a:tr h="370840">
-                <a:tc>
-                  <a:txBody>
-                    <a:bodyPr/>
-                    <a:lstStyle/>
-                    <a:p>
-                      <a:r>
-                        <a:rPr lang="en-US" dirty="0"/>
-                        <a:t>[30 min]</a:t>
-                      </a:r>
-                    </a:p>
-                  </a:txBody>
-                  <a:tcPr/>
-                </a:tc>
-                <a:tc>
-                  <a:txBody>
-                    <a:bodyPr/>
-                    <a:lstStyle/>
-                    <a:p>
-                      <a:pPr marL="0" marR="0" lvl="0" indent="0" algn="l" defTabSz="914400" rtl="0" eaLnBrk="1" fontAlgn="auto" latinLnBrk="0" hangingPunct="1">
-                        <a:lnSpc>
-                          <a:spcPct val="100000"/>
-                        </a:lnSpc>
-                        <a:spcBef>
-                          <a:spcPts val="0"/>
-                        </a:spcBef>
-                        <a:spcAft>
-                          <a:spcPts val="0"/>
-                        </a:spcAft>
-                        <a:buClrTx/>
-                        <a:buSzTx/>
-                        <a:buFontTx/>
-                        <a:buNone/>
-                        <a:tabLst/>
-                        <a:defRPr/>
-                      </a:pPr>
-                      <a:r>
-                        <a:rPr lang="en-US" sz="1800" kern="1200" dirty="0">
-                          <a:solidFill>
-                            <a:schemeClr val="dk1"/>
-                          </a:solidFill>
-                          <a:effectLst/>
-                          <a:latin typeface="+mn-lt"/>
-                          <a:ea typeface="+mn-ea"/>
-                          <a:cs typeface="+mn-cs"/>
-                        </a:rPr>
-                        <a:t>(2) NHPPPs – key properties</a:t>
-                      </a:r>
-                    </a:p>
-                  </a:txBody>
-                  <a:tcPr/>
-                </a:tc>
-                <a:tc>
-                  <a:txBody>
-                    <a:bodyPr/>
-                    <a:lstStyle/>
-                    <a:p>
-                      <a:r>
-                        <a:rPr lang="en-US" dirty="0" err="1"/>
-                        <a:t>Trikalinos</a:t>
-                      </a:r>
-                      <a:endParaRPr lang="en-US" dirty="0"/>
-                    </a:p>
-                  </a:txBody>
-                  <a:tcPr/>
-                </a:tc>
-                <a:extLst>
-                  <a:ext uri="{0D108BD9-81ED-4DB2-BD59-A6C34878D82A}">
-                    <a16:rowId xmlns:a16="http://schemas.microsoft.com/office/drawing/2014/main" val="2757944147"/>
-                  </a:ext>
-                </a:extLst>
-              </a:tr>
-              <a:tr h="370840">
-                <a:tc>
-                  <a:txBody>
-                    <a:bodyPr/>
-                    <a:lstStyle/>
-                    <a:p>
-                      <a:r>
-                        <a:rPr lang="en-US" dirty="0"/>
-                        <a:t>[30 min]</a:t>
-                      </a:r>
-                    </a:p>
-                  </a:txBody>
-                  <a:tcPr/>
-                </a:tc>
-                <a:tc>
-                  <a:txBody>
-                    <a:bodyPr/>
-                    <a:lstStyle/>
-                    <a:p>
-                      <a:r>
-                        <a:rPr lang="en-US" sz="1800" kern="1200" dirty="0">
-                          <a:solidFill>
-                            <a:schemeClr val="dk1"/>
-                          </a:solidFill>
-                          <a:effectLst/>
-                          <a:latin typeface="+mn-lt"/>
-                          <a:ea typeface="+mn-ea"/>
-                          <a:cs typeface="+mn-cs"/>
-                        </a:rPr>
-                        <a:t>(3) Sampling from NHPPPs</a:t>
-                      </a:r>
-                      <a:endParaRPr lang="en-US" dirty="0"/>
-                    </a:p>
-                  </a:txBody>
-                  <a:tcPr/>
-                </a:tc>
-                <a:tc>
-                  <a:txBody>
-                    <a:bodyPr/>
-                    <a:lstStyle/>
-                    <a:p>
-                      <a:r>
-                        <a:rPr lang="en-US" dirty="0" err="1"/>
-                        <a:t>Sereda</a:t>
-                      </a:r>
-                      <a:endParaRPr lang="en-US" dirty="0"/>
-                    </a:p>
-                  </a:txBody>
-                  <a:tcPr/>
-                </a:tc>
-                <a:extLst>
-                  <a:ext uri="{0D108BD9-81ED-4DB2-BD59-A6C34878D82A}">
-                    <a16:rowId xmlns:a16="http://schemas.microsoft.com/office/drawing/2014/main" val="1442363784"/>
-                  </a:ext>
-                </a:extLst>
-              </a:tr>
-              <a:tr h="370840">
-                <a:tc>
-                  <a:txBody>
-                    <a:bodyPr/>
-                    <a:lstStyle/>
-                    <a:p>
-                      <a:r>
-                        <a:rPr lang="en-US" dirty="0"/>
-                        <a:t>[15 min]</a:t>
-                      </a:r>
-                    </a:p>
-                  </a:txBody>
-                  <a:tcPr/>
-                </a:tc>
-                <a:tc>
-                  <a:txBody>
-                    <a:bodyPr/>
-                    <a:lstStyle/>
-                    <a:p>
-                      <a:pPr marL="0" marR="0" lvl="0" indent="0" algn="l" defTabSz="914400" rtl="0" eaLnBrk="1" fontAlgn="auto" latinLnBrk="0" hangingPunct="1">
-                        <a:lnSpc>
-                          <a:spcPct val="100000"/>
-                        </a:lnSpc>
-                        <a:spcBef>
-                          <a:spcPts val="0"/>
-                        </a:spcBef>
-                        <a:spcAft>
-                          <a:spcPts val="0"/>
-                        </a:spcAft>
-                        <a:buClrTx/>
-                        <a:buSzTx/>
-                        <a:buFontTx/>
-                        <a:buNone/>
-                        <a:tabLst/>
-                        <a:defRPr/>
-                      </a:pPr>
-                      <a:r>
-                        <a:rPr lang="en-US" b="1" dirty="0"/>
-                        <a:t>Break</a:t>
-                      </a:r>
-                    </a:p>
-                  </a:txBody>
-                  <a:tcPr/>
-                </a:tc>
-                <a:tc>
-                  <a:txBody>
-                    <a:bodyPr/>
-                    <a:lstStyle/>
-                    <a:p>
-                      <a:endParaRPr lang="en-US" dirty="0"/>
-                    </a:p>
-                  </a:txBody>
-                  <a:tcPr/>
-                </a:tc>
-                <a:extLst>
-                  <a:ext uri="{0D108BD9-81ED-4DB2-BD59-A6C34878D82A}">
-                    <a16:rowId xmlns:a16="http://schemas.microsoft.com/office/drawing/2014/main" val="1269228105"/>
-                  </a:ext>
-                </a:extLst>
-              </a:tr>
-              <a:tr h="370840">
-                <a:tc>
-                  <a:txBody>
-                    <a:bodyPr/>
-                    <a:lstStyle/>
-                    <a:p>
-                      <a:r>
-                        <a:rPr lang="en-US" dirty="0"/>
-                        <a:t>[80 min]</a:t>
-                      </a:r>
-                    </a:p>
-                  </a:txBody>
-                  <a:tcPr/>
-                </a:tc>
-                <a:tc>
-                  <a:txBody>
-                    <a:bodyPr/>
-                    <a:lstStyle/>
-                    <a:p>
-                      <a:r>
-                        <a:rPr lang="en-US" sz="1800" kern="1200" dirty="0">
-                          <a:solidFill>
-                            <a:schemeClr val="dk1"/>
-                          </a:solidFill>
-                          <a:effectLst/>
-                          <a:latin typeface="+mn-lt"/>
-                          <a:ea typeface="+mn-ea"/>
-                          <a:cs typeface="+mn-cs"/>
-                        </a:rPr>
-                        <a:t>(4) Guided exercise: </a:t>
-                      </a:r>
-                    </a:p>
-                    <a:p>
-                      <a:pPr marL="285750" indent="-285750">
-                        <a:buFontTx/>
-                        <a:buChar char="-"/>
-                      </a:pPr>
-                      <a:r>
-                        <a:rPr lang="en-US" sz="1800" kern="1200" dirty="0">
-                          <a:solidFill>
-                            <a:schemeClr val="dk1"/>
-                          </a:solidFill>
-                          <a:effectLst/>
-                          <a:latin typeface="+mn-lt"/>
-                          <a:ea typeface="+mn-ea"/>
-                          <a:cs typeface="+mn-cs"/>
-                        </a:rPr>
-                        <a:t>Implement a simple cancer natural history DES for one person</a:t>
-                      </a:r>
-                    </a:p>
-                    <a:p>
-                      <a:pPr marL="285750" indent="-285750">
-                        <a:buFontTx/>
-                        <a:buChar char="-"/>
-                      </a:pPr>
-                      <a:r>
-                        <a:rPr lang="en-US" sz="1800" kern="1200" dirty="0">
-                          <a:solidFill>
-                            <a:schemeClr val="dk1"/>
-                          </a:solidFill>
-                          <a:effectLst/>
-                          <a:latin typeface="+mn-lt"/>
-                          <a:ea typeface="+mn-ea"/>
-                          <a:cs typeface="+mn-cs"/>
-                        </a:rPr>
-                        <a:t>The many-person case</a:t>
-                      </a:r>
-                    </a:p>
-                    <a:p>
-                      <a:pPr marL="285750" indent="-285750">
-                        <a:buFontTx/>
-                        <a:buChar char="-"/>
-                      </a:pPr>
-                      <a:r>
-                        <a:rPr lang="en-US" sz="1800" kern="1200" dirty="0">
-                          <a:solidFill>
-                            <a:schemeClr val="dk1"/>
-                          </a:solidFill>
-                          <a:effectLst/>
-                          <a:latin typeface="+mn-lt"/>
-                          <a:ea typeface="+mn-ea"/>
-                          <a:cs typeface="+mn-cs"/>
-                        </a:rPr>
-                        <a:t>Packaging </a:t>
-                      </a:r>
-                    </a:p>
-                  </a:txBody>
-                  <a:tcPr/>
-                </a:tc>
-                <a:tc>
-                  <a:txBody>
-                    <a:bodyPr/>
-                    <a:lstStyle/>
-                    <a:p>
-                      <a:r>
-                        <a:rPr lang="en-US" dirty="0"/>
-                        <a:t>[All]</a:t>
-                      </a:r>
-                    </a:p>
-                    <a:p>
-                      <a:r>
-                        <a:rPr lang="en-US" dirty="0" err="1"/>
-                        <a:t>Chrysanthopoulou</a:t>
-                      </a:r>
-                      <a:endParaRPr lang="en-US" dirty="0"/>
-                    </a:p>
-                    <a:p>
-                      <a:endParaRPr lang="en-US" dirty="0"/>
-                    </a:p>
-                    <a:p>
-                      <a:r>
-                        <a:rPr lang="en-US" dirty="0" err="1"/>
-                        <a:t>Sereda</a:t>
-                      </a:r>
-                      <a:r>
-                        <a:rPr lang="en-US" dirty="0"/>
-                        <a:t>/</a:t>
-                      </a:r>
-                      <a:r>
-                        <a:rPr lang="en-US" dirty="0" err="1"/>
-                        <a:t>Alarid</a:t>
-                      </a:r>
-                      <a:r>
-                        <a:rPr lang="en-US" dirty="0"/>
-                        <a:t>-Escudero</a:t>
-                      </a:r>
-                    </a:p>
-                    <a:p>
-                      <a:r>
-                        <a:rPr lang="en-US" dirty="0" err="1"/>
-                        <a:t>Trikalinos</a:t>
-                      </a:r>
-                      <a:endParaRPr lang="en-US" dirty="0"/>
-                    </a:p>
-                  </a:txBody>
-                  <a:tcPr/>
-                </a:tc>
-                <a:extLst>
-                  <a:ext uri="{0D108BD9-81ED-4DB2-BD59-A6C34878D82A}">
-                    <a16:rowId xmlns:a16="http://schemas.microsoft.com/office/drawing/2014/main" val="1448491104"/>
-                  </a:ext>
-                </a:extLst>
-              </a:tr>
-              <a:tr h="370840">
-                <a:tc>
-                  <a:txBody>
-                    <a:bodyPr/>
-                    <a:lstStyle/>
-                    <a:p>
-                      <a:r>
-                        <a:rPr lang="en-US" dirty="0"/>
-                        <a:t>[10 min]</a:t>
-                      </a:r>
-                    </a:p>
-                  </a:txBody>
-                  <a:tcPr/>
-                </a:tc>
-                <a:tc>
-                  <a:txBody>
-                    <a:bodyPr/>
-                    <a:lstStyle/>
-                    <a:p>
-                      <a:pPr marL="0" marR="0" lvl="0" indent="0" algn="l" defTabSz="914400" rtl="0" eaLnBrk="1" fontAlgn="auto" latinLnBrk="0" hangingPunct="1">
-                        <a:lnSpc>
-                          <a:spcPct val="100000"/>
-                        </a:lnSpc>
-                        <a:spcBef>
-                          <a:spcPts val="0"/>
-                        </a:spcBef>
-                        <a:spcAft>
-                          <a:spcPts val="0"/>
-                        </a:spcAft>
-                        <a:buClrTx/>
-                        <a:buSzTx/>
-                        <a:buFontTx/>
-                        <a:buNone/>
-                        <a:tabLst/>
-                        <a:defRPr/>
-                      </a:pPr>
-                      <a:r>
-                        <a:rPr lang="en-US" sz="1800" kern="1200" dirty="0">
-                          <a:solidFill>
-                            <a:schemeClr val="dk1"/>
-                          </a:solidFill>
-                          <a:effectLst/>
-                          <a:latin typeface="+mn-lt"/>
-                          <a:ea typeface="+mn-ea"/>
-                          <a:cs typeface="+mn-cs"/>
-                        </a:rPr>
-                        <a:t>(5) Advanced Topic Teaser on self-excitatory processes: point processes that are not NHPPPs and when you may need them</a:t>
-                      </a:r>
-                    </a:p>
-                  </a:txBody>
-                  <a:tcPr/>
-                </a:tc>
-                <a:tc>
-                  <a:txBody>
-                    <a:bodyPr/>
-                    <a:lstStyle/>
-                    <a:p>
-                      <a:r>
-                        <a:rPr lang="en-US" dirty="0" err="1"/>
-                        <a:t>Trikalinos</a:t>
-                      </a:r>
-                      <a:endParaRPr lang="en-US" dirty="0"/>
-                    </a:p>
-                  </a:txBody>
-                  <a:tcPr/>
-                </a:tc>
-                <a:extLst>
-                  <a:ext uri="{0D108BD9-81ED-4DB2-BD59-A6C34878D82A}">
-                    <a16:rowId xmlns:a16="http://schemas.microsoft.com/office/drawing/2014/main" val="3766472740"/>
-                  </a:ext>
-                </a:extLst>
-              </a:tr>
-              <a:tr h="370840">
-                <a:tc>
-                  <a:txBody>
-                    <a:bodyPr/>
-                    <a:lstStyle/>
-                    <a:p>
-                      <a:r>
-                        <a:rPr lang="en-US" dirty="0"/>
-                        <a:t>[15 min]</a:t>
-                      </a:r>
-                    </a:p>
-                  </a:txBody>
-                  <a:tcPr/>
-                </a:tc>
-                <a:tc>
-                  <a:txBody>
-                    <a:bodyPr/>
-                    <a:lstStyle/>
-                    <a:p>
-                      <a:r>
-                        <a:rPr lang="en-US" dirty="0"/>
-                        <a:t>General Q &amp; A</a:t>
-                      </a:r>
-                    </a:p>
-                  </a:txBody>
-                  <a:tcPr/>
-                </a:tc>
-                <a:tc>
-                  <a:txBody>
-                    <a:bodyPr/>
-                    <a:lstStyle/>
-                    <a:p>
-                      <a:r>
-                        <a:rPr lang="en-US" dirty="0"/>
-                        <a:t>All</a:t>
-                      </a:r>
-                    </a:p>
-                  </a:txBody>
-                  <a:tcPr/>
-                </a:tc>
-                <a:extLst>
-                  <a:ext uri="{0D108BD9-81ED-4DB2-BD59-A6C34878D82A}">
-                    <a16:rowId xmlns:a16="http://schemas.microsoft.com/office/drawing/2014/main" val="3034331301"/>
-                  </a:ext>
-                </a:extLst>
-              </a:tr>
-            </a:tbl>
-          </a:graphicData>
-        </a:graphic>
-      </p:graphicFrame>
       <p:sp>
         <p:nvSpPr>
           <p:cNvPr id="5" name="Right Arrow 4">
@@ -15480,12 +15591,1439 @@
           </a:p>
         </p:txBody>
       </p:sp>
+      <mc:AlternateContent xmlns:mc="http://schemas.openxmlformats.org/markup-compatibility/2006" xmlns:a14="http://schemas.microsoft.com/office/drawing/2010/main">
+        <mc:Choice Requires="a14">
+          <p:graphicFrame>
+            <p:nvGraphicFramePr>
+              <p:cNvPr id="7" name="Content Placeholder 3">
+                <a:extLst>
+                  <a:ext uri="{FF2B5EF4-FFF2-40B4-BE49-F238E27FC236}">
+                    <a16:creationId xmlns:a16="http://schemas.microsoft.com/office/drawing/2014/main" id="{65937E63-3A50-8FF3-8283-5334746CE3C8}"/>
+                  </a:ext>
+                </a:extLst>
+              </p:cNvPr>
+              <p:cNvGraphicFramePr>
+                <a:graphicFrameLocks noGrp="1"/>
+              </p:cNvGraphicFramePr>
+              <p:nvPr>
+                <p:ph idx="1"/>
+                <p:extLst>
+                  <p:ext uri="{D42A27DB-BD31-4B8C-83A1-F6EECF244321}">
+                    <p14:modId xmlns:p14="http://schemas.microsoft.com/office/powerpoint/2010/main" val="260976388"/>
+                  </p:ext>
+                </p:extLst>
+              </p:nvPr>
+            </p:nvGraphicFramePr>
+            <p:xfrm>
+              <a:off x="1208690" y="942340"/>
+              <a:ext cx="10720551" cy="4699000"/>
+            </p:xfrm>
+            <a:graphic>
+              <a:graphicData uri="http://schemas.openxmlformats.org/drawingml/2006/table">
+                <a:tbl>
+                  <a:tblPr firstRow="1" bandRow="1">
+                    <a:tableStyleId>{21E4AEA4-8DFA-4A89-87EB-49C32662AFE0}</a:tableStyleId>
+                  </a:tblPr>
+                  <a:tblGrid>
+                    <a:gridCol w="1717110">
+                      <a:extLst>
+                        <a:ext uri="{9D8B030D-6E8A-4147-A177-3AD203B41FA5}">
+                          <a16:colId xmlns:a16="http://schemas.microsoft.com/office/drawing/2014/main" val="4182014441"/>
+                        </a:ext>
+                      </a:extLst>
+                    </a:gridCol>
+                    <a:gridCol w="5976462">
+                      <a:extLst>
+                        <a:ext uri="{9D8B030D-6E8A-4147-A177-3AD203B41FA5}">
+                          <a16:colId xmlns:a16="http://schemas.microsoft.com/office/drawing/2014/main" val="906180283"/>
+                        </a:ext>
+                      </a:extLst>
+                    </a:gridCol>
+                    <a:gridCol w="3026979">
+                      <a:extLst>
+                        <a:ext uri="{9D8B030D-6E8A-4147-A177-3AD203B41FA5}">
+                          <a16:colId xmlns:a16="http://schemas.microsoft.com/office/drawing/2014/main" val="2769721792"/>
+                        </a:ext>
+                      </a:extLst>
+                    </a:gridCol>
+                  </a:tblGrid>
+                  <a:tr h="370840">
+                    <a:tc>
+                      <a:txBody>
+                        <a:bodyPr/>
+                        <a:lstStyle/>
+                        <a:p>
+                          <a:r>
+                            <a:rPr lang="en-US" dirty="0"/>
+                            <a:t>Time</a:t>
+                          </a:r>
+                        </a:p>
+                      </a:txBody>
+                      <a:tcPr/>
+                    </a:tc>
+                    <a:tc>
+                      <a:txBody>
+                        <a:bodyPr/>
+                        <a:lstStyle/>
+                        <a:p>
+                          <a:r>
+                            <a:rPr lang="en-US" dirty="0"/>
+                            <a:t>Description</a:t>
+                          </a:r>
+                        </a:p>
+                      </a:txBody>
+                      <a:tcPr/>
+                    </a:tc>
+                    <a:tc>
+                      <a:txBody>
+                        <a:bodyPr/>
+                        <a:lstStyle/>
+                        <a:p>
+                          <a:r>
+                            <a:rPr lang="en-US" dirty="0"/>
+                            <a:t>Discussant</a:t>
+                          </a:r>
+                        </a:p>
+                      </a:txBody>
+                      <a:tcPr/>
+                    </a:tc>
+                    <a:extLst>
+                      <a:ext uri="{0D108BD9-81ED-4DB2-BD59-A6C34878D82A}">
+                        <a16:rowId xmlns:a16="http://schemas.microsoft.com/office/drawing/2014/main" val="1700444250"/>
+                      </a:ext>
+                    </a:extLst>
+                  </a:tr>
+                  <a:tr h="370840">
+                    <a:tc>
+                      <a:txBody>
+                        <a:bodyPr/>
+                        <a:lstStyle/>
+                        <a:p>
+                          <a:r>
+                            <a:rPr lang="en-US" dirty="0"/>
+                            <a:t>[15 min]</a:t>
+                          </a:r>
+                        </a:p>
+                      </a:txBody>
+                      <a:tcPr/>
+                    </a:tc>
+                    <a:tc>
+                      <a:txBody>
+                        <a:bodyPr/>
+                        <a:lstStyle/>
+                        <a:p>
+                          <a:r>
+                            <a:rPr lang="en-US" sz="1800" kern="1200" dirty="0">
+                              <a:solidFill>
+                                <a:schemeClr val="dk1"/>
+                              </a:solidFill>
+                              <a:effectLst/>
+                              <a:latin typeface="+mn-lt"/>
+                              <a:ea typeface="+mn-ea"/>
+                              <a:cs typeface="+mn-cs"/>
+                            </a:rPr>
+                            <a:t>(0) Introductions and administrivia </a:t>
+                          </a:r>
+                          <a:endParaRPr lang="en-US" dirty="0"/>
+                        </a:p>
+                      </a:txBody>
+                      <a:tcPr/>
+                    </a:tc>
+                    <a:tc>
+                      <a:txBody>
+                        <a:bodyPr/>
+                        <a:lstStyle/>
+                        <a:p>
+                          <a:r>
+                            <a:rPr lang="en-US" dirty="0" err="1"/>
+                            <a:t>Trikalinos</a:t>
+                          </a:r>
+                          <a:endParaRPr lang="en-US" dirty="0"/>
+                        </a:p>
+                      </a:txBody>
+                      <a:tcPr/>
+                    </a:tc>
+                    <a:extLst>
+                      <a:ext uri="{0D108BD9-81ED-4DB2-BD59-A6C34878D82A}">
+                        <a16:rowId xmlns:a16="http://schemas.microsoft.com/office/drawing/2014/main" val="2490995723"/>
+                      </a:ext>
+                    </a:extLst>
+                  </a:tr>
+                  <a:tr h="370840">
+                    <a:tc>
+                      <a:txBody>
+                        <a:bodyPr/>
+                        <a:lstStyle/>
+                        <a:p>
+                          <a:r>
+                            <a:rPr lang="en-US" dirty="0"/>
+                            <a:t>[25 min]</a:t>
+                          </a:r>
+                        </a:p>
+                      </a:txBody>
+                      <a:tcPr/>
+                    </a:tc>
+                    <a:tc>
+                      <a:txBody>
+                        <a:bodyPr/>
+                        <a:lstStyle/>
+                        <a:p>
+                          <a:r>
+                            <a:rPr lang="en-US" sz="1800" kern="1200" dirty="0">
+                              <a:solidFill>
+                                <a:schemeClr val="dk1"/>
+                              </a:solidFill>
+                              <a:effectLst/>
+                              <a:latin typeface="+mn-lt"/>
+                              <a:ea typeface="+mn-ea"/>
+                              <a:cs typeface="+mn-cs"/>
+                            </a:rPr>
+                            <a:t>(1) DES as a composition of point processes</a:t>
+                          </a:r>
+                        </a:p>
+                      </a:txBody>
+                      <a:tcPr/>
+                    </a:tc>
+                    <a:tc>
+                      <a:txBody>
+                        <a:bodyPr/>
+                        <a:lstStyle/>
+                        <a:p>
+                          <a:r>
+                            <a:rPr lang="en-US" dirty="0" err="1"/>
+                            <a:t>Alarid</a:t>
+                          </a:r>
+                          <a:r>
+                            <a:rPr lang="en-US" dirty="0"/>
+                            <a:t>-Escudero</a:t>
+                          </a:r>
+                        </a:p>
+                      </a:txBody>
+                      <a:tcPr/>
+                    </a:tc>
+                    <a:extLst>
+                      <a:ext uri="{0D108BD9-81ED-4DB2-BD59-A6C34878D82A}">
+                        <a16:rowId xmlns:a16="http://schemas.microsoft.com/office/drawing/2014/main" val="2065491183"/>
+                      </a:ext>
+                    </a:extLst>
+                  </a:tr>
+                  <a:tr h="370840">
+                    <a:tc>
+                      <a:txBody>
+                        <a:bodyPr/>
+                        <a:lstStyle/>
+                        <a:p>
+                          <a:r>
+                            <a:rPr lang="en-US" dirty="0"/>
+                            <a:t>[30 min]</a:t>
+                          </a:r>
+                        </a:p>
+                      </a:txBody>
+                      <a:tcPr/>
+                    </a:tc>
+                    <a:tc>
+                      <a:txBody>
+                        <a:bodyPr/>
+                        <a:lstStyle/>
+                        <a:p>
+                          <a:pPr marL="0" marR="0" lvl="0" indent="0" algn="l" defTabSz="914400" rtl="0" eaLnBrk="1" fontAlgn="auto" latinLnBrk="0" hangingPunct="1">
+                            <a:lnSpc>
+                              <a:spcPct val="100000"/>
+                            </a:lnSpc>
+                            <a:spcBef>
+                              <a:spcPts val="0"/>
+                            </a:spcBef>
+                            <a:spcAft>
+                              <a:spcPts val="0"/>
+                            </a:spcAft>
+                            <a:buClrTx/>
+                            <a:buSzTx/>
+                            <a:buFontTx/>
+                            <a:buNone/>
+                            <a:tabLst/>
+                            <a:defRPr/>
+                          </a:pPr>
+                          <a:r>
+                            <a:rPr lang="en-US" sz="1800" kern="1200" dirty="0">
+                              <a:solidFill>
+                                <a:schemeClr val="dk1"/>
+                              </a:solidFill>
+                              <a:effectLst/>
+                              <a:latin typeface="+mn-lt"/>
+                              <a:ea typeface="+mn-ea"/>
+                              <a:cs typeface="+mn-cs"/>
+                            </a:rPr>
+                            <a:t>(2) NHPPPs – key properties</a:t>
+                          </a:r>
+                        </a:p>
+                      </a:txBody>
+                      <a:tcPr/>
+                    </a:tc>
+                    <a:tc>
+                      <a:txBody>
+                        <a:bodyPr/>
+                        <a:lstStyle/>
+                        <a:p>
+                          <a:r>
+                            <a:rPr lang="en-US" dirty="0" err="1"/>
+                            <a:t>Trikalinos</a:t>
+                          </a:r>
+                          <a:endParaRPr lang="en-US" dirty="0"/>
+                        </a:p>
+                      </a:txBody>
+                      <a:tcPr/>
+                    </a:tc>
+                    <a:extLst>
+                      <a:ext uri="{0D108BD9-81ED-4DB2-BD59-A6C34878D82A}">
+                        <a16:rowId xmlns:a16="http://schemas.microsoft.com/office/drawing/2014/main" val="2757944147"/>
+                      </a:ext>
+                    </a:extLst>
+                  </a:tr>
+                  <a:tr h="370840">
+                    <a:tc>
+                      <a:txBody>
+                        <a:bodyPr/>
+                        <a:lstStyle/>
+                        <a:p>
+                          <a:r>
+                            <a:rPr lang="en-US" dirty="0"/>
+                            <a:t>[30 min]</a:t>
+                          </a:r>
+                        </a:p>
+                      </a:txBody>
+                      <a:tcPr/>
+                    </a:tc>
+                    <a:tc>
+                      <a:txBody>
+                        <a:bodyPr/>
+                        <a:lstStyle/>
+                        <a:p>
+                          <a:r>
+                            <a:rPr lang="en-US" sz="1800" kern="1200" dirty="0">
+                              <a:solidFill>
+                                <a:schemeClr val="dk1"/>
+                              </a:solidFill>
+                              <a:effectLst/>
+                              <a:latin typeface="+mn-lt"/>
+                              <a:ea typeface="+mn-ea"/>
+                              <a:cs typeface="+mn-cs"/>
+                            </a:rPr>
+                            <a:t>(3) Sampling from NHPPPs</a:t>
+                          </a:r>
+                          <a:endParaRPr lang="en-US" dirty="0"/>
+                        </a:p>
+                      </a:txBody>
+                      <a:tcPr/>
+                    </a:tc>
+                    <a:tc>
+                      <a:txBody>
+                        <a:bodyPr/>
+                        <a:lstStyle/>
+                        <a:p>
+                          <a:pPr marL="0" marR="0" lvl="0" indent="0" algn="l" defTabSz="914400" rtl="0" eaLnBrk="1" fontAlgn="auto" latinLnBrk="0" hangingPunct="1">
+                            <a:lnSpc>
+                              <a:spcPct val="100000"/>
+                            </a:lnSpc>
+                            <a:spcBef>
+                              <a:spcPts val="0"/>
+                            </a:spcBef>
+                            <a:spcAft>
+                              <a:spcPts val="0"/>
+                            </a:spcAft>
+                            <a:buClrTx/>
+                            <a:buSzTx/>
+                            <a:buFontTx/>
+                            <a:buNone/>
+                            <a:tabLst/>
+                            <a:defRPr/>
+                          </a:pPr>
+                          <a:r>
+                            <a:rPr lang="en-US" dirty="0"/>
+                            <a:t>Trikalinos</a:t>
+                          </a:r>
+                        </a:p>
+                      </a:txBody>
+                      <a:tcPr/>
+                    </a:tc>
+                    <a:extLst>
+                      <a:ext uri="{0D108BD9-81ED-4DB2-BD59-A6C34878D82A}">
+                        <a16:rowId xmlns:a16="http://schemas.microsoft.com/office/drawing/2014/main" val="1442363784"/>
+                      </a:ext>
+                    </a:extLst>
+                  </a:tr>
+                  <a:tr h="370840">
+                    <a:tc>
+                      <a:txBody>
+                        <a:bodyPr/>
+                        <a:lstStyle/>
+                        <a:p>
+                          <a:r>
+                            <a:rPr lang="en-US" dirty="0"/>
+                            <a:t>[15 min]</a:t>
+                          </a:r>
+                        </a:p>
+                      </a:txBody>
+                      <a:tcPr/>
+                    </a:tc>
+                    <a:tc>
+                      <a:txBody>
+                        <a:bodyPr/>
+                        <a:lstStyle/>
+                        <a:p>
+                          <a:pPr marL="0" marR="0" lvl="0" indent="0" algn="l" defTabSz="914400" rtl="0" eaLnBrk="1" fontAlgn="auto" latinLnBrk="0" hangingPunct="1">
+                            <a:lnSpc>
+                              <a:spcPct val="100000"/>
+                            </a:lnSpc>
+                            <a:spcBef>
+                              <a:spcPts val="0"/>
+                            </a:spcBef>
+                            <a:spcAft>
+                              <a:spcPts val="0"/>
+                            </a:spcAft>
+                            <a:buClrTx/>
+                            <a:buSzTx/>
+                            <a:buFontTx/>
+                            <a:buNone/>
+                            <a:tabLst/>
+                            <a:defRPr/>
+                          </a:pPr>
+                          <a:r>
+                            <a:rPr lang="en-US" b="1" dirty="0"/>
+                            <a:t>Break</a:t>
+                          </a:r>
+                        </a:p>
+                      </a:txBody>
+                      <a:tcPr/>
+                    </a:tc>
+                    <a:tc>
+                      <a:txBody>
+                        <a:bodyPr/>
+                        <a:lstStyle/>
+                        <a:p>
+                          <a:endParaRPr lang="en-US" dirty="0"/>
+                        </a:p>
+                      </a:txBody>
+                      <a:tcPr/>
+                    </a:tc>
+                    <a:extLst>
+                      <a:ext uri="{0D108BD9-81ED-4DB2-BD59-A6C34878D82A}">
+                        <a16:rowId xmlns:a16="http://schemas.microsoft.com/office/drawing/2014/main" val="1269228105"/>
+                      </a:ext>
+                    </a:extLst>
+                  </a:tr>
+                  <a:tr h="370840">
+                    <a:tc>
+                      <a:txBody>
+                        <a:bodyPr/>
+                        <a:lstStyle/>
+                        <a:p>
+                          <a:r>
+                            <a:rPr lang="en-US" dirty="0"/>
+                            <a:t>[80 min]</a:t>
+                          </a:r>
+                        </a:p>
+                      </a:txBody>
+                      <a:tcPr/>
+                    </a:tc>
+                    <a:tc>
+                      <a:txBody>
+                        <a:bodyPr/>
+                        <a:lstStyle/>
+                        <a:p>
+                          <a:r>
+                            <a:rPr lang="en-US" sz="1800" kern="1200" dirty="0">
+                              <a:solidFill>
+                                <a:schemeClr val="dk1"/>
+                              </a:solidFill>
+                              <a:effectLst/>
+                              <a:latin typeface="+mn-lt"/>
+                              <a:ea typeface="+mn-ea"/>
+                              <a:cs typeface="+mn-cs"/>
+                            </a:rPr>
+                            <a:t>(4) Working with code</a:t>
+                          </a:r>
+                        </a:p>
+                        <a:p>
+                          <a:r>
+                            <a:rPr lang="en-US" sz="1800" kern="1200" dirty="0">
+                              <a:solidFill>
+                                <a:schemeClr val="dk1"/>
+                              </a:solidFill>
+                              <a:effectLst/>
+                              <a:latin typeface="+mn-lt"/>
+                              <a:ea typeface="+mn-ea"/>
+                              <a:cs typeface="+mn-cs"/>
+                            </a:rPr>
+                            <a:t>-- Base </a:t>
+                          </a:r>
+                          <a:r>
+                            <a:rPr lang="en-US" sz="1800" kern="1200" dirty="0">
+                              <a:solidFill>
+                                <a:schemeClr val="dk1"/>
+                              </a:solidFill>
+                              <a:effectLst/>
+                              <a:latin typeface="Courier New" panose="02070309020205020404" pitchFamily="49" charset="0"/>
+                              <a:ea typeface="+mn-ea"/>
+                              <a:cs typeface="Courier New" panose="02070309020205020404" pitchFamily="49" charset="0"/>
+                            </a:rPr>
+                            <a:t>R</a:t>
+                          </a:r>
+                          <a:r>
+                            <a:rPr lang="en-US" sz="1800" kern="1200" dirty="0">
+                              <a:solidFill>
+                                <a:schemeClr val="dk1"/>
+                              </a:solidFill>
+                              <a:effectLst/>
+                              <a:latin typeface="+mn-lt"/>
+                              <a:ea typeface="+mn-ea"/>
+                              <a:cs typeface="+mn-cs"/>
+                            </a:rPr>
+                            <a:t> vs </a:t>
+                          </a:r>
+                          <a:r>
+                            <a:rPr lang="en-US" sz="1800" kern="1200" dirty="0" err="1">
+                              <a:solidFill>
+                                <a:schemeClr val="dk1"/>
+                              </a:solidFill>
+                              <a:effectLst/>
+                              <a:latin typeface="Courier New" panose="02070309020205020404" pitchFamily="49" charset="0"/>
+                              <a:ea typeface="+mn-ea"/>
+                              <a:cs typeface="Courier New" panose="02070309020205020404" pitchFamily="49" charset="0"/>
+                            </a:rPr>
+                            <a:t>nhppp</a:t>
+                          </a:r>
+                          <a:r>
+                            <a:rPr lang="en-US" sz="1800" kern="1200" dirty="0">
+                              <a:solidFill>
+                                <a:schemeClr val="dk1"/>
+                              </a:solidFill>
+                              <a:effectLst/>
+                              <a:latin typeface="+mn-lt"/>
+                              <a:ea typeface="+mn-ea"/>
+                              <a:cs typeface="+mn-cs"/>
+                            </a:rPr>
+                            <a:t>:  Simulate first vs all events in </a:t>
+                          </a:r>
+                          <a14:m>
+                            <m:oMath xmlns:m="http://schemas.openxmlformats.org/officeDocument/2006/math">
+                              <m:r>
+                                <a:rPr lang="en-US" sz="1800" b="0" i="1" kern="1200" smtClean="0">
+                                  <a:solidFill>
+                                    <a:schemeClr val="dk1"/>
+                                  </a:solidFill>
+                                  <a:effectLst/>
+                                  <a:latin typeface="Cambria Math" panose="02040503050406030204" pitchFamily="18" charset="0"/>
+                                  <a:ea typeface="+mn-ea"/>
+                                  <a:cs typeface="+mn-cs"/>
+                                </a:rPr>
+                                <m:t>(</m:t>
+                              </m:r>
+                              <m:r>
+                                <m:rPr>
+                                  <m:sty m:val="p"/>
+                                </m:rPr>
+                                <a:rPr lang="en-US" sz="1800" b="0" i="1" kern="1200" smtClean="0">
+                                  <a:solidFill>
+                                    <a:schemeClr val="dk1"/>
+                                  </a:solidFill>
+                                  <a:effectLst/>
+                                  <a:latin typeface="Cambria Math" panose="02040503050406030204" pitchFamily="18" charset="0"/>
+                                  <a:ea typeface="+mn-ea"/>
+                                  <a:cs typeface="+mn-cs"/>
+                                </a:rPr>
+                                <m:t>a</m:t>
+                              </m:r>
+                              <m:r>
+                                <a:rPr lang="en-US" sz="1800" b="0" i="1" kern="1200" smtClean="0">
+                                  <a:solidFill>
+                                    <a:schemeClr val="dk1"/>
+                                  </a:solidFill>
+                                  <a:effectLst/>
+                                  <a:latin typeface="Cambria Math" panose="02040503050406030204" pitchFamily="18" charset="0"/>
+                                  <a:ea typeface="+mn-ea"/>
+                                  <a:cs typeface="+mn-cs"/>
+                                </a:rPr>
+                                <m:t>,</m:t>
+                              </m:r>
+                              <m:r>
+                                <m:rPr>
+                                  <m:sty m:val="p"/>
+                                </m:rPr>
+                                <a:rPr lang="en-US" sz="1800" b="0" i="1" kern="1200" smtClean="0">
+                                  <a:solidFill>
+                                    <a:schemeClr val="dk1"/>
+                                  </a:solidFill>
+                                  <a:effectLst/>
+                                  <a:latin typeface="Cambria Math" panose="02040503050406030204" pitchFamily="18" charset="0"/>
+                                  <a:ea typeface="+mn-ea"/>
+                                  <a:cs typeface="+mn-cs"/>
+                                </a:rPr>
+                                <m:t>b</m:t>
+                              </m:r>
+                              <m:r>
+                                <a:rPr lang="en-US" sz="1800" b="0" i="1" kern="1200" smtClean="0">
+                                  <a:solidFill>
+                                    <a:schemeClr val="dk1"/>
+                                  </a:solidFill>
+                                  <a:effectLst/>
+                                  <a:latin typeface="Cambria Math" panose="02040503050406030204" pitchFamily="18" charset="0"/>
+                                  <a:ea typeface="+mn-ea"/>
+                                  <a:cs typeface="+mn-cs"/>
+                                </a:rPr>
+                                <m:t>]</m:t>
+                              </m:r>
+                            </m:oMath>
+                          </a14:m>
+                          <a:endParaRPr lang="en-US" sz="1800" kern="1200" dirty="0">
+                            <a:solidFill>
+                              <a:schemeClr val="dk1"/>
+                            </a:solidFill>
+                            <a:effectLst/>
+                            <a:latin typeface="+mn-lt"/>
+                            <a:ea typeface="+mn-ea"/>
+                            <a:cs typeface="+mn-cs"/>
+                          </a:endParaRPr>
+                        </a:p>
+                        <a:p>
+                          <a:r>
+                            <a:rPr lang="en-US" sz="1800" kern="1200" dirty="0">
+                              <a:solidFill>
+                                <a:schemeClr val="dk1"/>
+                              </a:solidFill>
+                              <a:effectLst/>
+                              <a:latin typeface="+mn-lt"/>
+                              <a:ea typeface="+mn-ea"/>
+                              <a:cs typeface="+mn-cs"/>
+                            </a:rPr>
+                            <a:t>-- Packaging a simple cancer DES </a:t>
+                          </a:r>
+                        </a:p>
+                        <a:p>
+                          <a:r>
+                            <a:rPr lang="en-US" sz="1800" kern="1200" dirty="0">
+                              <a:solidFill>
+                                <a:schemeClr val="dk1"/>
+                              </a:solidFill>
+                              <a:effectLst/>
+                              <a:latin typeface="+mn-lt"/>
+                              <a:ea typeface="+mn-ea"/>
+                              <a:cs typeface="+mn-cs"/>
+                            </a:rPr>
+                            <a:t>-- The vectorized case </a:t>
+                          </a:r>
+                        </a:p>
+                      </a:txBody>
+                      <a:tcPr/>
+                    </a:tc>
+                    <a:tc>
+                      <a:txBody>
+                        <a:bodyPr/>
+                        <a:lstStyle/>
+                        <a:p>
+                          <a:r>
+                            <a:rPr lang="en-US" dirty="0"/>
+                            <a:t>[All]</a:t>
+                          </a:r>
+                        </a:p>
+                        <a:p>
+                          <a:r>
+                            <a:rPr lang="en-US" dirty="0"/>
+                            <a:t>Trikalinos</a:t>
+                          </a:r>
+                        </a:p>
+                        <a:p>
+                          <a:r>
+                            <a:rPr lang="en-US" dirty="0"/>
+                            <a:t>Sereda</a:t>
+                          </a:r>
+                        </a:p>
+                        <a:p>
+                          <a:pPr marL="0" marR="0" lvl="0" indent="0" algn="l" defTabSz="914400" rtl="0" eaLnBrk="1" fontAlgn="auto" latinLnBrk="0" hangingPunct="1">
+                            <a:lnSpc>
+                              <a:spcPct val="100000"/>
+                            </a:lnSpc>
+                            <a:spcBef>
+                              <a:spcPts val="0"/>
+                            </a:spcBef>
+                            <a:spcAft>
+                              <a:spcPts val="0"/>
+                            </a:spcAft>
+                            <a:buClrTx/>
+                            <a:buSzTx/>
+                            <a:buFontTx/>
+                            <a:buNone/>
+                            <a:tabLst/>
+                            <a:defRPr/>
+                          </a:pPr>
+                          <a:r>
+                            <a:rPr lang="en-US" dirty="0"/>
+                            <a:t>Sereda</a:t>
+                          </a:r>
+                        </a:p>
+                      </a:txBody>
+                      <a:tcPr/>
+                    </a:tc>
+                    <a:extLst>
+                      <a:ext uri="{0D108BD9-81ED-4DB2-BD59-A6C34878D82A}">
+                        <a16:rowId xmlns:a16="http://schemas.microsoft.com/office/drawing/2014/main" val="1448491104"/>
+                      </a:ext>
+                    </a:extLst>
+                  </a:tr>
+                  <a:tr h="370840">
+                    <a:tc>
+                      <a:txBody>
+                        <a:bodyPr/>
+                        <a:lstStyle/>
+                        <a:p>
+                          <a:r>
+                            <a:rPr lang="en-US" dirty="0"/>
+                            <a:t>[5 min]</a:t>
+                          </a:r>
+                        </a:p>
+                      </a:txBody>
+                      <a:tcPr/>
+                    </a:tc>
+                    <a:tc>
+                      <a:txBody>
+                        <a:bodyPr/>
+                        <a:lstStyle/>
+                        <a:p>
+                          <a:pPr marL="0" marR="0" lvl="0" indent="0" algn="l" defTabSz="914400" rtl="0" eaLnBrk="1" fontAlgn="auto" latinLnBrk="0" hangingPunct="1">
+                            <a:lnSpc>
+                              <a:spcPct val="100000"/>
+                            </a:lnSpc>
+                            <a:spcBef>
+                              <a:spcPts val="0"/>
+                            </a:spcBef>
+                            <a:spcAft>
+                              <a:spcPts val="0"/>
+                            </a:spcAft>
+                            <a:buClrTx/>
+                            <a:buSzTx/>
+                            <a:buFontTx/>
+                            <a:buNone/>
+                            <a:tabLst/>
+                            <a:defRPr/>
+                          </a:pPr>
+                          <a:r>
+                            <a:rPr lang="en-US" sz="1800" kern="1200" dirty="0">
+                              <a:solidFill>
+                                <a:schemeClr val="dk1"/>
+                              </a:solidFill>
+                              <a:effectLst/>
+                              <a:latin typeface="+mn-lt"/>
+                              <a:ea typeface="+mn-ea"/>
+                              <a:cs typeface="+mn-cs"/>
+                            </a:rPr>
+                            <a:t>(5) Advanced Topic Teaser on self-excitatory processes: point processes that are not NHPPPs and when you may need them</a:t>
+                          </a:r>
+                        </a:p>
+                      </a:txBody>
+                      <a:tcPr/>
+                    </a:tc>
+                    <a:tc>
+                      <a:txBody>
+                        <a:bodyPr/>
+                        <a:lstStyle/>
+                        <a:p>
+                          <a:r>
+                            <a:rPr lang="en-US" dirty="0"/>
+                            <a:t>Trikalinos</a:t>
+                          </a:r>
+                        </a:p>
+                      </a:txBody>
+                      <a:tcPr/>
+                    </a:tc>
+                    <a:extLst>
+                      <a:ext uri="{0D108BD9-81ED-4DB2-BD59-A6C34878D82A}">
+                        <a16:rowId xmlns:a16="http://schemas.microsoft.com/office/drawing/2014/main" val="3766472740"/>
+                      </a:ext>
+                    </a:extLst>
+                  </a:tr>
+                  <a:tr h="370840">
+                    <a:tc>
+                      <a:txBody>
+                        <a:bodyPr/>
+                        <a:lstStyle/>
+                        <a:p>
+                          <a:r>
+                            <a:rPr lang="en-US" dirty="0"/>
+                            <a:t>[15 min]</a:t>
+                          </a:r>
+                        </a:p>
+                      </a:txBody>
+                      <a:tcPr/>
+                    </a:tc>
+                    <a:tc>
+                      <a:txBody>
+                        <a:bodyPr/>
+                        <a:lstStyle/>
+                        <a:p>
+                          <a:r>
+                            <a:rPr lang="en-US" dirty="0"/>
+                            <a:t>General Q &amp; A</a:t>
+                          </a:r>
+                        </a:p>
+                      </a:txBody>
+                      <a:tcPr/>
+                    </a:tc>
+                    <a:tc>
+                      <a:txBody>
+                        <a:bodyPr/>
+                        <a:lstStyle/>
+                        <a:p>
+                          <a:r>
+                            <a:rPr lang="en-US" dirty="0"/>
+                            <a:t>All</a:t>
+                          </a:r>
+                        </a:p>
+                      </a:txBody>
+                      <a:tcPr/>
+                    </a:tc>
+                    <a:extLst>
+                      <a:ext uri="{0D108BD9-81ED-4DB2-BD59-A6C34878D82A}">
+                        <a16:rowId xmlns:a16="http://schemas.microsoft.com/office/drawing/2014/main" val="3034331301"/>
+                      </a:ext>
+                    </a:extLst>
+                  </a:tr>
+                </a:tbl>
+              </a:graphicData>
+            </a:graphic>
+          </p:graphicFrame>
+        </mc:Choice>
+        <mc:Fallback xmlns="">
+          <p:graphicFrame>
+            <p:nvGraphicFramePr>
+              <p:cNvPr id="7" name="Content Placeholder 3">
+                <a:extLst>
+                  <a:ext uri="{FF2B5EF4-FFF2-40B4-BE49-F238E27FC236}">
+                    <a16:creationId xmlns:a16="http://schemas.microsoft.com/office/drawing/2014/main" id="{65937E63-3A50-8FF3-8283-5334746CE3C8}"/>
+                  </a:ext>
+                </a:extLst>
+              </p:cNvPr>
+              <p:cNvGraphicFramePr>
+                <a:graphicFrameLocks noGrp="1"/>
+              </p:cNvGraphicFramePr>
+              <p:nvPr>
+                <p:ph idx="1"/>
+                <p:extLst>
+                  <p:ext uri="{D42A27DB-BD31-4B8C-83A1-F6EECF244321}">
+                    <p14:modId xmlns:p14="http://schemas.microsoft.com/office/powerpoint/2010/main" val="260976388"/>
+                  </p:ext>
+                </p:extLst>
+              </p:nvPr>
+            </p:nvGraphicFramePr>
+            <p:xfrm>
+              <a:off x="1208690" y="942340"/>
+              <a:ext cx="10720551" cy="4699000"/>
+            </p:xfrm>
+            <a:graphic>
+              <a:graphicData uri="http://schemas.openxmlformats.org/drawingml/2006/table">
+                <a:tbl>
+                  <a:tblPr firstRow="1" bandRow="1">
+                    <a:tableStyleId>{21E4AEA4-8DFA-4A89-87EB-49C32662AFE0}</a:tableStyleId>
+                  </a:tblPr>
+                  <a:tblGrid>
+                    <a:gridCol w="1717110">
+                      <a:extLst>
+                        <a:ext uri="{9D8B030D-6E8A-4147-A177-3AD203B41FA5}">
+                          <a16:colId xmlns:a16="http://schemas.microsoft.com/office/drawing/2014/main" val="4182014441"/>
+                        </a:ext>
+                      </a:extLst>
+                    </a:gridCol>
+                    <a:gridCol w="5976462">
+                      <a:extLst>
+                        <a:ext uri="{9D8B030D-6E8A-4147-A177-3AD203B41FA5}">
+                          <a16:colId xmlns:a16="http://schemas.microsoft.com/office/drawing/2014/main" val="906180283"/>
+                        </a:ext>
+                      </a:extLst>
+                    </a:gridCol>
+                    <a:gridCol w="3026979">
+                      <a:extLst>
+                        <a:ext uri="{9D8B030D-6E8A-4147-A177-3AD203B41FA5}">
+                          <a16:colId xmlns:a16="http://schemas.microsoft.com/office/drawing/2014/main" val="2769721792"/>
+                        </a:ext>
+                      </a:extLst>
+                    </a:gridCol>
+                  </a:tblGrid>
+                  <a:tr h="370840">
+                    <a:tc>
+                      <a:txBody>
+                        <a:bodyPr/>
+                        <a:lstStyle/>
+                        <a:p>
+                          <a:r>
+                            <a:rPr lang="en-US" dirty="0"/>
+                            <a:t>Time</a:t>
+                          </a:r>
+                        </a:p>
+                      </a:txBody>
+                      <a:tcPr/>
+                    </a:tc>
+                    <a:tc>
+                      <a:txBody>
+                        <a:bodyPr/>
+                        <a:lstStyle/>
+                        <a:p>
+                          <a:r>
+                            <a:rPr lang="en-US" dirty="0"/>
+                            <a:t>Description</a:t>
+                          </a:r>
+                        </a:p>
+                      </a:txBody>
+                      <a:tcPr/>
+                    </a:tc>
+                    <a:tc>
+                      <a:txBody>
+                        <a:bodyPr/>
+                        <a:lstStyle/>
+                        <a:p>
+                          <a:r>
+                            <a:rPr lang="en-US" dirty="0"/>
+                            <a:t>Discussant</a:t>
+                          </a:r>
+                        </a:p>
+                      </a:txBody>
+                      <a:tcPr/>
+                    </a:tc>
+                    <a:extLst>
+                      <a:ext uri="{0D108BD9-81ED-4DB2-BD59-A6C34878D82A}">
+                        <a16:rowId xmlns:a16="http://schemas.microsoft.com/office/drawing/2014/main" val="1700444250"/>
+                      </a:ext>
+                    </a:extLst>
+                  </a:tr>
+                  <a:tr h="370840">
+                    <a:tc>
+                      <a:txBody>
+                        <a:bodyPr/>
+                        <a:lstStyle/>
+                        <a:p>
+                          <a:r>
+                            <a:rPr lang="en-US" dirty="0"/>
+                            <a:t>[15 min]</a:t>
+                          </a:r>
+                        </a:p>
+                      </a:txBody>
+                      <a:tcPr/>
+                    </a:tc>
+                    <a:tc>
+                      <a:txBody>
+                        <a:bodyPr/>
+                        <a:lstStyle/>
+                        <a:p>
+                          <a:r>
+                            <a:rPr lang="en-US" sz="1800" kern="1200" dirty="0">
+                              <a:solidFill>
+                                <a:schemeClr val="dk1"/>
+                              </a:solidFill>
+                              <a:effectLst/>
+                              <a:latin typeface="+mn-lt"/>
+                              <a:ea typeface="+mn-ea"/>
+                              <a:cs typeface="+mn-cs"/>
+                            </a:rPr>
+                            <a:t>(0) Introductions and administrivia </a:t>
+                          </a:r>
+                          <a:endParaRPr lang="en-US" dirty="0"/>
+                        </a:p>
+                      </a:txBody>
+                      <a:tcPr/>
+                    </a:tc>
+                    <a:tc>
+                      <a:txBody>
+                        <a:bodyPr/>
+                        <a:lstStyle/>
+                        <a:p>
+                          <a:r>
+                            <a:rPr lang="en-US" dirty="0" err="1"/>
+                            <a:t>Trikalinos</a:t>
+                          </a:r>
+                          <a:endParaRPr lang="en-US" dirty="0"/>
+                        </a:p>
+                      </a:txBody>
+                      <a:tcPr/>
+                    </a:tc>
+                    <a:extLst>
+                      <a:ext uri="{0D108BD9-81ED-4DB2-BD59-A6C34878D82A}">
+                        <a16:rowId xmlns:a16="http://schemas.microsoft.com/office/drawing/2014/main" val="2490995723"/>
+                      </a:ext>
+                    </a:extLst>
+                  </a:tr>
+                  <a:tr h="370840">
+                    <a:tc>
+                      <a:txBody>
+                        <a:bodyPr/>
+                        <a:lstStyle/>
+                        <a:p>
+                          <a:r>
+                            <a:rPr lang="en-US" dirty="0"/>
+                            <a:t>[25 min]</a:t>
+                          </a:r>
+                        </a:p>
+                      </a:txBody>
+                      <a:tcPr/>
+                    </a:tc>
+                    <a:tc>
+                      <a:txBody>
+                        <a:bodyPr/>
+                        <a:lstStyle/>
+                        <a:p>
+                          <a:r>
+                            <a:rPr lang="en-US" sz="1800" kern="1200" dirty="0">
+                              <a:solidFill>
+                                <a:schemeClr val="dk1"/>
+                              </a:solidFill>
+                              <a:effectLst/>
+                              <a:latin typeface="+mn-lt"/>
+                              <a:ea typeface="+mn-ea"/>
+                              <a:cs typeface="+mn-cs"/>
+                            </a:rPr>
+                            <a:t>(1) DES as a composition of point processes</a:t>
+                          </a:r>
+                        </a:p>
+                      </a:txBody>
+                      <a:tcPr/>
+                    </a:tc>
+                    <a:tc>
+                      <a:txBody>
+                        <a:bodyPr/>
+                        <a:lstStyle/>
+                        <a:p>
+                          <a:r>
+                            <a:rPr lang="en-US" dirty="0" err="1"/>
+                            <a:t>Alarid</a:t>
+                          </a:r>
+                          <a:r>
+                            <a:rPr lang="en-US" dirty="0"/>
+                            <a:t>-Escudero</a:t>
+                          </a:r>
+                        </a:p>
+                      </a:txBody>
+                      <a:tcPr/>
+                    </a:tc>
+                    <a:extLst>
+                      <a:ext uri="{0D108BD9-81ED-4DB2-BD59-A6C34878D82A}">
+                        <a16:rowId xmlns:a16="http://schemas.microsoft.com/office/drawing/2014/main" val="2065491183"/>
+                      </a:ext>
+                    </a:extLst>
+                  </a:tr>
+                  <a:tr h="370840">
+                    <a:tc>
+                      <a:txBody>
+                        <a:bodyPr/>
+                        <a:lstStyle/>
+                        <a:p>
+                          <a:r>
+                            <a:rPr lang="en-US" dirty="0"/>
+                            <a:t>[30 min]</a:t>
+                          </a:r>
+                        </a:p>
+                      </a:txBody>
+                      <a:tcPr/>
+                    </a:tc>
+                    <a:tc>
+                      <a:txBody>
+                        <a:bodyPr/>
+                        <a:lstStyle/>
+                        <a:p>
+                          <a:pPr marL="0" marR="0" lvl="0" indent="0" algn="l" defTabSz="914400" rtl="0" eaLnBrk="1" fontAlgn="auto" latinLnBrk="0" hangingPunct="1">
+                            <a:lnSpc>
+                              <a:spcPct val="100000"/>
+                            </a:lnSpc>
+                            <a:spcBef>
+                              <a:spcPts val="0"/>
+                            </a:spcBef>
+                            <a:spcAft>
+                              <a:spcPts val="0"/>
+                            </a:spcAft>
+                            <a:buClrTx/>
+                            <a:buSzTx/>
+                            <a:buFontTx/>
+                            <a:buNone/>
+                            <a:tabLst/>
+                            <a:defRPr/>
+                          </a:pPr>
+                          <a:r>
+                            <a:rPr lang="en-US" sz="1800" kern="1200" dirty="0">
+                              <a:solidFill>
+                                <a:schemeClr val="dk1"/>
+                              </a:solidFill>
+                              <a:effectLst/>
+                              <a:latin typeface="+mn-lt"/>
+                              <a:ea typeface="+mn-ea"/>
+                              <a:cs typeface="+mn-cs"/>
+                            </a:rPr>
+                            <a:t>(2) NHPPPs – key properties</a:t>
+                          </a:r>
+                        </a:p>
+                      </a:txBody>
+                      <a:tcPr/>
+                    </a:tc>
+                    <a:tc>
+                      <a:txBody>
+                        <a:bodyPr/>
+                        <a:lstStyle/>
+                        <a:p>
+                          <a:r>
+                            <a:rPr lang="en-US" dirty="0" err="1"/>
+                            <a:t>Trikalinos</a:t>
+                          </a:r>
+                          <a:endParaRPr lang="en-US" dirty="0"/>
+                        </a:p>
+                      </a:txBody>
+                      <a:tcPr/>
+                    </a:tc>
+                    <a:extLst>
+                      <a:ext uri="{0D108BD9-81ED-4DB2-BD59-A6C34878D82A}">
+                        <a16:rowId xmlns:a16="http://schemas.microsoft.com/office/drawing/2014/main" val="2757944147"/>
+                      </a:ext>
+                    </a:extLst>
+                  </a:tr>
+                  <a:tr h="370840">
+                    <a:tc>
+                      <a:txBody>
+                        <a:bodyPr/>
+                        <a:lstStyle/>
+                        <a:p>
+                          <a:r>
+                            <a:rPr lang="en-US" dirty="0"/>
+                            <a:t>[30 min]</a:t>
+                          </a:r>
+                        </a:p>
+                      </a:txBody>
+                      <a:tcPr/>
+                    </a:tc>
+                    <a:tc>
+                      <a:txBody>
+                        <a:bodyPr/>
+                        <a:lstStyle/>
+                        <a:p>
+                          <a:r>
+                            <a:rPr lang="en-US" sz="1800" kern="1200" dirty="0">
+                              <a:solidFill>
+                                <a:schemeClr val="dk1"/>
+                              </a:solidFill>
+                              <a:effectLst/>
+                              <a:latin typeface="+mn-lt"/>
+                              <a:ea typeface="+mn-ea"/>
+                              <a:cs typeface="+mn-cs"/>
+                            </a:rPr>
+                            <a:t>(3) Sampling from NHPPPs</a:t>
+                          </a:r>
+                          <a:endParaRPr lang="en-US" dirty="0"/>
+                        </a:p>
+                      </a:txBody>
+                      <a:tcPr/>
+                    </a:tc>
+                    <a:tc>
+                      <a:txBody>
+                        <a:bodyPr/>
+                        <a:lstStyle/>
+                        <a:p>
+                          <a:pPr marL="0" marR="0" lvl="0" indent="0" algn="l" defTabSz="914400" rtl="0" eaLnBrk="1" fontAlgn="auto" latinLnBrk="0" hangingPunct="1">
+                            <a:lnSpc>
+                              <a:spcPct val="100000"/>
+                            </a:lnSpc>
+                            <a:spcBef>
+                              <a:spcPts val="0"/>
+                            </a:spcBef>
+                            <a:spcAft>
+                              <a:spcPts val="0"/>
+                            </a:spcAft>
+                            <a:buClrTx/>
+                            <a:buSzTx/>
+                            <a:buFontTx/>
+                            <a:buNone/>
+                            <a:tabLst/>
+                            <a:defRPr/>
+                          </a:pPr>
+                          <a:r>
+                            <a:rPr lang="en-US" dirty="0"/>
+                            <a:t>Trikalinos</a:t>
+                          </a:r>
+                        </a:p>
+                      </a:txBody>
+                      <a:tcPr/>
+                    </a:tc>
+                    <a:extLst>
+                      <a:ext uri="{0D108BD9-81ED-4DB2-BD59-A6C34878D82A}">
+                        <a16:rowId xmlns:a16="http://schemas.microsoft.com/office/drawing/2014/main" val="1442363784"/>
+                      </a:ext>
+                    </a:extLst>
+                  </a:tr>
+                  <a:tr h="370840">
+                    <a:tc>
+                      <a:txBody>
+                        <a:bodyPr/>
+                        <a:lstStyle/>
+                        <a:p>
+                          <a:r>
+                            <a:rPr lang="en-US" dirty="0"/>
+                            <a:t>[15 min]</a:t>
+                          </a:r>
+                        </a:p>
+                      </a:txBody>
+                      <a:tcPr/>
+                    </a:tc>
+                    <a:tc>
+                      <a:txBody>
+                        <a:bodyPr/>
+                        <a:lstStyle/>
+                        <a:p>
+                          <a:pPr marL="0" marR="0" lvl="0" indent="0" algn="l" defTabSz="914400" rtl="0" eaLnBrk="1" fontAlgn="auto" latinLnBrk="0" hangingPunct="1">
+                            <a:lnSpc>
+                              <a:spcPct val="100000"/>
+                            </a:lnSpc>
+                            <a:spcBef>
+                              <a:spcPts val="0"/>
+                            </a:spcBef>
+                            <a:spcAft>
+                              <a:spcPts val="0"/>
+                            </a:spcAft>
+                            <a:buClrTx/>
+                            <a:buSzTx/>
+                            <a:buFontTx/>
+                            <a:buNone/>
+                            <a:tabLst/>
+                            <a:defRPr/>
+                          </a:pPr>
+                          <a:r>
+                            <a:rPr lang="en-US" b="1" dirty="0"/>
+                            <a:t>Break</a:t>
+                          </a:r>
+                        </a:p>
+                      </a:txBody>
+                      <a:tcPr/>
+                    </a:tc>
+                    <a:tc>
+                      <a:txBody>
+                        <a:bodyPr/>
+                        <a:lstStyle/>
+                        <a:p>
+                          <a:endParaRPr lang="en-US" dirty="0"/>
+                        </a:p>
+                      </a:txBody>
+                      <a:tcPr/>
+                    </a:tc>
+                    <a:extLst>
+                      <a:ext uri="{0D108BD9-81ED-4DB2-BD59-A6C34878D82A}">
+                        <a16:rowId xmlns:a16="http://schemas.microsoft.com/office/drawing/2014/main" val="1269228105"/>
+                      </a:ext>
+                    </a:extLst>
+                  </a:tr>
+                  <a:tr h="1188720">
+                    <a:tc>
+                      <a:txBody>
+                        <a:bodyPr/>
+                        <a:lstStyle/>
+                        <a:p>
+                          <a:r>
+                            <a:rPr lang="en-US" dirty="0"/>
+                            <a:t>[80 min]</a:t>
+                          </a:r>
+                        </a:p>
+                      </a:txBody>
+                      <a:tcPr/>
+                    </a:tc>
+                    <a:tc>
+                      <a:txBody>
+                        <a:bodyPr/>
+                        <a:lstStyle/>
+                        <a:p>
+                          <a:endParaRPr lang="en-US"/>
+                        </a:p>
+                      </a:txBody>
+                      <a:tcPr>
+                        <a:blipFill>
+                          <a:blip r:embed="rId2"/>
+                          <a:stretch>
+                            <a:fillRect l="-28875" t="-189362" r="-51168" b="-114894"/>
+                          </a:stretch>
+                        </a:blipFill>
+                      </a:tcPr>
+                    </a:tc>
+                    <a:tc>
+                      <a:txBody>
+                        <a:bodyPr/>
+                        <a:lstStyle/>
+                        <a:p>
+                          <a:r>
+                            <a:rPr lang="en-US" dirty="0"/>
+                            <a:t>[All]</a:t>
+                          </a:r>
+                        </a:p>
+                        <a:p>
+                          <a:r>
+                            <a:rPr lang="en-US" dirty="0"/>
+                            <a:t>Trikalinos</a:t>
+                          </a:r>
+                        </a:p>
+                        <a:p>
+                          <a:r>
+                            <a:rPr lang="en-US" dirty="0"/>
+                            <a:t>Sereda</a:t>
+                          </a:r>
+                        </a:p>
+                        <a:p>
+                          <a:pPr marL="0" marR="0" lvl="0" indent="0" algn="l" defTabSz="914400" rtl="0" eaLnBrk="1" fontAlgn="auto" latinLnBrk="0" hangingPunct="1">
+                            <a:lnSpc>
+                              <a:spcPct val="100000"/>
+                            </a:lnSpc>
+                            <a:spcBef>
+                              <a:spcPts val="0"/>
+                            </a:spcBef>
+                            <a:spcAft>
+                              <a:spcPts val="0"/>
+                            </a:spcAft>
+                            <a:buClrTx/>
+                            <a:buSzTx/>
+                            <a:buFontTx/>
+                            <a:buNone/>
+                            <a:tabLst/>
+                            <a:defRPr/>
+                          </a:pPr>
+                          <a:r>
+                            <a:rPr lang="en-US" dirty="0"/>
+                            <a:t>Sereda</a:t>
+                          </a:r>
+                        </a:p>
+                      </a:txBody>
+                      <a:tcPr/>
+                    </a:tc>
+                    <a:extLst>
+                      <a:ext uri="{0D108BD9-81ED-4DB2-BD59-A6C34878D82A}">
+                        <a16:rowId xmlns:a16="http://schemas.microsoft.com/office/drawing/2014/main" val="1448491104"/>
+                      </a:ext>
+                    </a:extLst>
+                  </a:tr>
+                  <a:tr h="914400">
+                    <a:tc>
+                      <a:txBody>
+                        <a:bodyPr/>
+                        <a:lstStyle/>
+                        <a:p>
+                          <a:r>
+                            <a:rPr lang="en-US" dirty="0"/>
+                            <a:t>[5 min]</a:t>
+                          </a:r>
+                        </a:p>
+                      </a:txBody>
+                      <a:tcPr/>
+                    </a:tc>
+                    <a:tc>
+                      <a:txBody>
+                        <a:bodyPr/>
+                        <a:lstStyle/>
+                        <a:p>
+                          <a:pPr marL="0" marR="0" lvl="0" indent="0" algn="l" defTabSz="914400" rtl="0" eaLnBrk="1" fontAlgn="auto" latinLnBrk="0" hangingPunct="1">
+                            <a:lnSpc>
+                              <a:spcPct val="100000"/>
+                            </a:lnSpc>
+                            <a:spcBef>
+                              <a:spcPts val="0"/>
+                            </a:spcBef>
+                            <a:spcAft>
+                              <a:spcPts val="0"/>
+                            </a:spcAft>
+                            <a:buClrTx/>
+                            <a:buSzTx/>
+                            <a:buFontTx/>
+                            <a:buNone/>
+                            <a:tabLst/>
+                            <a:defRPr/>
+                          </a:pPr>
+                          <a:r>
+                            <a:rPr lang="en-US" sz="1800" kern="1200" dirty="0">
+                              <a:solidFill>
+                                <a:schemeClr val="dk1"/>
+                              </a:solidFill>
+                              <a:effectLst/>
+                              <a:latin typeface="+mn-lt"/>
+                              <a:ea typeface="+mn-ea"/>
+                              <a:cs typeface="+mn-cs"/>
+                            </a:rPr>
+                            <a:t>(5) Advanced Topic Teaser on self-excitatory processes: point processes that are not NHPPPs and when you may need them</a:t>
+                          </a:r>
+                        </a:p>
+                      </a:txBody>
+                      <a:tcPr/>
+                    </a:tc>
+                    <a:tc>
+                      <a:txBody>
+                        <a:bodyPr/>
+                        <a:lstStyle/>
+                        <a:p>
+                          <a:r>
+                            <a:rPr lang="en-US" dirty="0"/>
+                            <a:t>Trikalinos</a:t>
+                          </a:r>
+                        </a:p>
+                      </a:txBody>
+                      <a:tcPr/>
+                    </a:tc>
+                    <a:extLst>
+                      <a:ext uri="{0D108BD9-81ED-4DB2-BD59-A6C34878D82A}">
+                        <a16:rowId xmlns:a16="http://schemas.microsoft.com/office/drawing/2014/main" val="3766472740"/>
+                      </a:ext>
+                    </a:extLst>
+                  </a:tr>
+                  <a:tr h="370840">
+                    <a:tc>
+                      <a:txBody>
+                        <a:bodyPr/>
+                        <a:lstStyle/>
+                        <a:p>
+                          <a:r>
+                            <a:rPr lang="en-US" dirty="0"/>
+                            <a:t>[15 min]</a:t>
+                          </a:r>
+                        </a:p>
+                      </a:txBody>
+                      <a:tcPr/>
+                    </a:tc>
+                    <a:tc>
+                      <a:txBody>
+                        <a:bodyPr/>
+                        <a:lstStyle/>
+                        <a:p>
+                          <a:r>
+                            <a:rPr lang="en-US" dirty="0"/>
+                            <a:t>General Q &amp; A</a:t>
+                          </a:r>
+                        </a:p>
+                      </a:txBody>
+                      <a:tcPr/>
+                    </a:tc>
+                    <a:tc>
+                      <a:txBody>
+                        <a:bodyPr/>
+                        <a:lstStyle/>
+                        <a:p>
+                          <a:r>
+                            <a:rPr lang="en-US" dirty="0"/>
+                            <a:t>All</a:t>
+                          </a:r>
+                        </a:p>
+                      </a:txBody>
+                      <a:tcPr/>
+                    </a:tc>
+                    <a:extLst>
+                      <a:ext uri="{0D108BD9-81ED-4DB2-BD59-A6C34878D82A}">
+                        <a16:rowId xmlns:a16="http://schemas.microsoft.com/office/drawing/2014/main" val="3034331301"/>
+                      </a:ext>
+                    </a:extLst>
+                  </a:tr>
+                </a:tbl>
+              </a:graphicData>
+            </a:graphic>
+          </p:graphicFrame>
+        </mc:Fallback>
+      </mc:AlternateContent>
       <p:sp>
         <p:nvSpPr>
-          <p:cNvPr id="3" name="TextBox 2">
+          <p:cNvPr id="8" name="TextBox 7">
             <a:extLst>
               <a:ext uri="{FF2B5EF4-FFF2-40B4-BE49-F238E27FC236}">
-                <a16:creationId xmlns:a16="http://schemas.microsoft.com/office/drawing/2014/main" id="{4A6CCEF4-91A7-627D-24B6-82E2F89222AD}"/>
+                <a16:creationId xmlns:a16="http://schemas.microsoft.com/office/drawing/2014/main" id="{0086B163-3B66-D909-CB79-98EBCDB2E4C2}"/>
               </a:ext>
             </a:extLst>
           </p:cNvPr>
@@ -15510,7 +17048,7 @@
           <a:p>
             <a:r>
               <a:rPr lang="en-US" sz="2400" dirty="0"/>
-              <a:t>Sunday 15</a:t>
+              <a:t>Sunday 28</a:t>
             </a:r>
             <a:r>
               <a:rPr lang="en-US" sz="2400" baseline="30000" dirty="0"/>
@@ -15518,7 +17056,17 @@
             </a:r>
             <a:r>
               <a:rPr lang="en-US" sz="2400" dirty="0"/>
-              <a:t> of June, 9:00 to 12:30</a:t>
+              <a:t> of June, 8:35 to 12:</a:t>
+            </a:r>
+            <a:r>
+              <a:rPr lang="en-US" sz="2400" dirty="0">
+                <a:sym typeface="Wingdings" pitchFamily="2" charset="2"/>
+              </a:rPr>
+              <a:t>0</a:t>
+            </a:r>
+            <a:r>
+              <a:rPr lang="en-US" sz="2400" dirty="0"/>
+              <a:t>0</a:t>
             </a:r>
           </a:p>
         </p:txBody>

--- a/2026_SMDM/03_Sampling.pptx
+++ b/2026_SMDM/03_Sampling.pptx
@@ -5,7 +5,7 @@
     <p:sldMasterId id="2147483648" r:id="rId4"/>
   </p:sldMasterIdLst>
   <p:notesMasterIdLst>
-    <p:notesMasterId r:id="rId33"/>
+    <p:notesMasterId r:id="rId34"/>
   </p:notesMasterIdLst>
   <p:sldIdLst>
     <p:sldId id="1100" r:id="rId5"/>
@@ -34,8 +34,9 @@
     <p:sldId id="1107" r:id="rId28"/>
     <p:sldId id="1109" r:id="rId29"/>
     <p:sldId id="1110" r:id="rId30"/>
-    <p:sldId id="1079" r:id="rId31"/>
-    <p:sldId id="1101" r:id="rId32"/>
+    <p:sldId id="1111" r:id="rId31"/>
+    <p:sldId id="1079" r:id="rId32"/>
+    <p:sldId id="1101" r:id="rId33"/>
   </p:sldIdLst>
   <p:sldSz cx="12192000" cy="6858000"/>
   <p:notesSz cx="6858000" cy="9144000"/>
@@ -235,7 +236,7 @@
           <a:p>
             <a:fld id="{E033252C-ECEF-0044-BF19-FBFB46CE84A2}" type="datetimeFigureOut">
               <a:rPr lang="en-US" smtClean="0"/>
-              <a:t>6/27/26</a:t>
+              <a:t>6/28/26</a:t>
             </a:fld>
             <a:endParaRPr lang="en-US"/>
           </a:p>
@@ -733,7 +734,7 @@
           <a:p>
             <a:fld id="{6A8FB48A-BFC4-2846-8228-6201ABA4D0C5}" type="datetimeFigureOut">
               <a:rPr lang="en-US" smtClean="0"/>
-              <a:t>6/27/26</a:t>
+              <a:t>6/28/26</a:t>
             </a:fld>
             <a:endParaRPr lang="en-US"/>
           </a:p>
@@ -931,7 +932,7 @@
           <a:p>
             <a:fld id="{6A8FB48A-BFC4-2846-8228-6201ABA4D0C5}" type="datetimeFigureOut">
               <a:rPr lang="en-US" smtClean="0"/>
-              <a:t>6/27/26</a:t>
+              <a:t>6/28/26</a:t>
             </a:fld>
             <a:endParaRPr lang="en-US"/>
           </a:p>
@@ -1139,7 +1140,7 @@
           <a:p>
             <a:fld id="{6A8FB48A-BFC4-2846-8228-6201ABA4D0C5}" type="datetimeFigureOut">
               <a:rPr lang="en-US" smtClean="0"/>
-              <a:t>6/27/26</a:t>
+              <a:t>6/28/26</a:t>
             </a:fld>
             <a:endParaRPr lang="en-US"/>
           </a:p>
@@ -1337,7 +1338,7 @@
           <a:p>
             <a:fld id="{6A8FB48A-BFC4-2846-8228-6201ABA4D0C5}" type="datetimeFigureOut">
               <a:rPr lang="en-US" smtClean="0"/>
-              <a:t>6/27/26</a:t>
+              <a:t>6/28/26</a:t>
             </a:fld>
             <a:endParaRPr lang="en-US"/>
           </a:p>
@@ -1612,7 +1613,7 @@
           <a:p>
             <a:fld id="{6A8FB48A-BFC4-2846-8228-6201ABA4D0C5}" type="datetimeFigureOut">
               <a:rPr lang="en-US" smtClean="0"/>
-              <a:t>6/27/26</a:t>
+              <a:t>6/28/26</a:t>
             </a:fld>
             <a:endParaRPr lang="en-US"/>
           </a:p>
@@ -1877,7 +1878,7 @@
           <a:p>
             <a:fld id="{6A8FB48A-BFC4-2846-8228-6201ABA4D0C5}" type="datetimeFigureOut">
               <a:rPr lang="en-US" smtClean="0"/>
-              <a:t>6/27/26</a:t>
+              <a:t>6/28/26</a:t>
             </a:fld>
             <a:endParaRPr lang="en-US"/>
           </a:p>
@@ -2289,7 +2290,7 @@
           <a:p>
             <a:fld id="{6A8FB48A-BFC4-2846-8228-6201ABA4D0C5}" type="datetimeFigureOut">
               <a:rPr lang="en-US" smtClean="0"/>
-              <a:t>6/27/26</a:t>
+              <a:t>6/28/26</a:t>
             </a:fld>
             <a:endParaRPr lang="en-US"/>
           </a:p>
@@ -2430,7 +2431,7 @@
           <a:p>
             <a:fld id="{6A8FB48A-BFC4-2846-8228-6201ABA4D0C5}" type="datetimeFigureOut">
               <a:rPr lang="en-US" smtClean="0"/>
-              <a:t>6/27/26</a:t>
+              <a:t>6/28/26</a:t>
             </a:fld>
             <a:endParaRPr lang="en-US"/>
           </a:p>
@@ -2543,7 +2544,7 @@
           <a:p>
             <a:fld id="{6A8FB48A-BFC4-2846-8228-6201ABA4D0C5}" type="datetimeFigureOut">
               <a:rPr lang="en-US" smtClean="0"/>
-              <a:t>6/27/26</a:t>
+              <a:t>6/28/26</a:t>
             </a:fld>
             <a:endParaRPr lang="en-US"/>
           </a:p>
@@ -2854,7 +2855,7 @@
           <a:p>
             <a:fld id="{6A8FB48A-BFC4-2846-8228-6201ABA4D0C5}" type="datetimeFigureOut">
               <a:rPr lang="en-US" smtClean="0"/>
-              <a:t>6/27/26</a:t>
+              <a:t>6/28/26</a:t>
             </a:fld>
             <a:endParaRPr lang="en-US"/>
           </a:p>
@@ -3142,7 +3143,7 @@
           <a:p>
             <a:fld id="{6A8FB48A-BFC4-2846-8228-6201ABA4D0C5}" type="datetimeFigureOut">
               <a:rPr lang="en-US" smtClean="0"/>
-              <a:t>6/27/26</a:t>
+              <a:t>6/28/26</a:t>
             </a:fld>
             <a:endParaRPr lang="en-US"/>
           </a:p>
@@ -3383,7 +3384,7 @@
           <a:p>
             <a:fld id="{6A8FB48A-BFC4-2846-8228-6201ABA4D0C5}" type="datetimeFigureOut">
               <a:rPr lang="en-US" smtClean="0"/>
-              <a:t>6/27/26</a:t>
+              <a:t>6/28/26</a:t>
             </a:fld>
             <a:endParaRPr lang="en-US"/>
           </a:p>
@@ -15462,6 +15463,197 @@
   <p:cSld>
     <p:spTree>
       <p:nvGrpSpPr>
+        <p:cNvPr id="1" name="">
+          <a:extLst>
+            <a:ext uri="{FF2B5EF4-FFF2-40B4-BE49-F238E27FC236}">
+              <a16:creationId xmlns:a16="http://schemas.microsoft.com/office/drawing/2014/main" id="{31D4FCFA-BF43-2E61-DD9A-9DEA9DE9FD40}"/>
+            </a:ext>
+          </a:extLst>
+        </p:cNvPr>
+        <p:cNvGrpSpPr/>
+        <p:nvPr/>
+      </p:nvGrpSpPr>
+      <p:grpSpPr>
+        <a:xfrm>
+          <a:off x="0" y="0"/>
+          <a:ext cx="0" cy="0"/>
+          <a:chOff x="0" y="0"/>
+          <a:chExt cx="0" cy="0"/>
+        </a:xfrm>
+      </p:grpSpPr>
+      <p:pic>
+        <p:nvPicPr>
+          <p:cNvPr id="10" name="Picture 9">
+            <a:extLst>
+              <a:ext uri="{FF2B5EF4-FFF2-40B4-BE49-F238E27FC236}">
+                <a16:creationId xmlns:a16="http://schemas.microsoft.com/office/drawing/2014/main" id="{E99AC403-2E2C-4CAF-1B4F-F2CA36DFCAB9}"/>
+              </a:ext>
+            </a:extLst>
+          </p:cNvPr>
+          <p:cNvPicPr>
+            <a:picLocks noChangeAspect="1"/>
+          </p:cNvPicPr>
+          <p:nvPr/>
+        </p:nvPicPr>
+        <p:blipFill>
+          <a:blip r:embed="rId2"/>
+          <a:stretch>
+            <a:fillRect/>
+          </a:stretch>
+        </p:blipFill>
+        <p:spPr>
+          <a:xfrm>
+            <a:off x="4751295" y="4281229"/>
+            <a:ext cx="7440706" cy="2576771"/>
+          </a:xfrm>
+          <a:prstGeom prst="rect">
+            <a:avLst/>
+          </a:prstGeom>
+        </p:spPr>
+      </p:pic>
+      <p:sp>
+        <p:nvSpPr>
+          <p:cNvPr id="14" name="Title 13">
+            <a:extLst>
+              <a:ext uri="{FF2B5EF4-FFF2-40B4-BE49-F238E27FC236}">
+                <a16:creationId xmlns:a16="http://schemas.microsoft.com/office/drawing/2014/main" id="{21EB19F1-271F-6355-88E5-9D7FD1270696}"/>
+              </a:ext>
+            </a:extLst>
+          </p:cNvPr>
+          <p:cNvSpPr>
+            <a:spLocks noGrp="1"/>
+          </p:cNvSpPr>
+          <p:nvPr>
+            <p:ph type="title"/>
+          </p:nvPr>
+        </p:nvSpPr>
+        <p:spPr>
+          <a:xfrm>
+            <a:off x="838200" y="552954"/>
+            <a:ext cx="10515600" cy="765544"/>
+          </a:xfrm>
+        </p:spPr>
+        <p:txBody>
+          <a:bodyPr/>
+          <a:lstStyle/>
+          <a:p>
+            <a:r>
+              <a:rPr lang="en-US" dirty="0"/>
+              <a:t>More in these works…</a:t>
+            </a:r>
+          </a:p>
+        </p:txBody>
+      </p:sp>
+      <p:pic>
+        <p:nvPicPr>
+          <p:cNvPr id="5" name="Picture 4">
+            <a:extLst>
+              <a:ext uri="{FF2B5EF4-FFF2-40B4-BE49-F238E27FC236}">
+                <a16:creationId xmlns:a16="http://schemas.microsoft.com/office/drawing/2014/main" id="{AFB5E61A-1A18-441D-5037-15C543B26B5E}"/>
+              </a:ext>
+            </a:extLst>
+          </p:cNvPr>
+          <p:cNvPicPr>
+            <a:picLocks noChangeAspect="1"/>
+          </p:cNvPicPr>
+          <p:nvPr/>
+        </p:nvPicPr>
+        <p:blipFill>
+          <a:blip r:embed="rId3"/>
+          <a:stretch>
+            <a:fillRect/>
+          </a:stretch>
+        </p:blipFill>
+        <p:spPr>
+          <a:xfrm>
+            <a:off x="526351" y="1295343"/>
+            <a:ext cx="7033460" cy="3086884"/>
+          </a:xfrm>
+          <a:prstGeom prst="rect">
+            <a:avLst/>
+          </a:prstGeom>
+        </p:spPr>
+      </p:pic>
+      <p:sp>
+        <p:nvSpPr>
+          <p:cNvPr id="11" name="TextBox 10">
+            <a:extLst>
+              <a:ext uri="{FF2B5EF4-FFF2-40B4-BE49-F238E27FC236}">
+                <a16:creationId xmlns:a16="http://schemas.microsoft.com/office/drawing/2014/main" id="{3EDA273B-E45E-FC4C-506D-393BACE26FD8}"/>
+              </a:ext>
+            </a:extLst>
+          </p:cNvPr>
+          <p:cNvSpPr txBox="1"/>
+          <p:nvPr/>
+        </p:nvSpPr>
+        <p:spPr>
+          <a:xfrm>
+            <a:off x="2580096" y="4108260"/>
+            <a:ext cx="5824152" cy="261610"/>
+          </a:xfrm>
+          <a:prstGeom prst="rect">
+            <a:avLst/>
+          </a:prstGeom>
+          <a:noFill/>
+        </p:spPr>
+        <p:txBody>
+          <a:bodyPr wrap="square">
+            <a:spAutoFit/>
+          </a:bodyPr>
+          <a:lstStyle/>
+          <a:p>
+            <a:r>
+              <a:rPr lang="en-US" sz="1100" b="0" i="0" u="none" strike="noStrike" dirty="0">
+                <a:solidFill>
+                  <a:srgbClr val="222222"/>
+                </a:solidFill>
+                <a:effectLst/>
+                <a:latin typeface="Merriweather Sans" pitchFamily="2" charset="77"/>
+              </a:rPr>
+              <a:t>https://</a:t>
+            </a:r>
+            <a:r>
+              <a:rPr lang="en-US" sz="1100" b="0" i="0" u="none" strike="noStrike" dirty="0" err="1">
+                <a:solidFill>
+                  <a:srgbClr val="222222"/>
+                </a:solidFill>
+                <a:effectLst/>
+                <a:latin typeface="Merriweather Sans" pitchFamily="2" charset="77"/>
+              </a:rPr>
+              <a:t>doi.org</a:t>
+            </a:r>
+            <a:r>
+              <a:rPr lang="en-US" sz="1100" b="0" i="0" u="none" strike="noStrike" dirty="0">
+                <a:solidFill>
+                  <a:srgbClr val="222222"/>
+                </a:solidFill>
+                <a:effectLst/>
+                <a:latin typeface="Merriweather Sans" pitchFamily="2" charset="77"/>
+              </a:rPr>
+              <a:t>/10.1007/s40273-025-01571-3</a:t>
+            </a:r>
+            <a:endParaRPr lang="en-US" sz="1100" dirty="0"/>
+          </a:p>
+        </p:txBody>
+      </p:sp>
+    </p:spTree>
+    <p:extLst>
+      <p:ext uri="{BB962C8B-B14F-4D97-AF65-F5344CB8AC3E}">
+        <p14:creationId xmlns:p14="http://schemas.microsoft.com/office/powerpoint/2010/main" val="1847581528"/>
+      </p:ext>
+    </p:extLst>
+  </p:cSld>
+  <p:clrMapOvr>
+    <a:masterClrMapping/>
+  </p:clrMapOvr>
+</p:sld>
+</file>
+
+<file path=ppt/slides/slide28.xml><?xml version="1.0" encoding="utf-8"?>
+<p:sld xmlns:a="http://schemas.openxmlformats.org/drawingml/2006/main" xmlns:r="http://schemas.openxmlformats.org/officeDocument/2006/relationships" xmlns:p="http://schemas.openxmlformats.org/presentationml/2006/main">
+  <p:cSld>
+    <p:spTree>
+      <p:nvGrpSpPr>
         <p:cNvPr id="1" name=""/>
         <p:cNvGrpSpPr/>
         <p:nvPr/>
@@ -15515,7 +15707,7 @@
 </p:sld>
 </file>
 
-<file path=ppt/slides/slide28.xml><?xml version="1.0" encoding="utf-8"?>
+<file path=ppt/slides/slide29.xml><?xml version="1.0" encoding="utf-8"?>
 <p:sld xmlns:a="http://schemas.openxmlformats.org/drawingml/2006/main" xmlns:r="http://schemas.openxmlformats.org/officeDocument/2006/relationships" xmlns:p="http://schemas.openxmlformats.org/presentationml/2006/main">
   <p:cSld>
     <p:spTree>
@@ -20918,17 +21110,6 @@
 </file>
 
 <file path=customXml/item1.xml><?xml version="1.0" encoding="utf-8"?>
-<p:properties xmlns:p="http://schemas.microsoft.com/office/2006/metadata/properties" xmlns:xsi="http://www.w3.org/2001/XMLSchema-instance" xmlns:pc="http://schemas.microsoft.com/office/infopath/2007/PartnerControls">
-  <documentManagement>
-    <TaxCatchAll xmlns="b6c9d19c-b34a-4cf4-8ebf-64c63fc48083" xsi:nil="true"/>
-    <lcf76f155ced4ddcb4097134ff3c332f xmlns="33f92c16-e346-46b5-ac57-2b519ac4cf68">
-      <Terms xmlns="http://schemas.microsoft.com/office/infopath/2007/PartnerControls"/>
-    </lcf76f155ced4ddcb4097134ff3c332f>
-  </documentManagement>
-</p:properties>
-</file>
-
-<file path=customXml/item2.xml><?xml version="1.0" encoding="utf-8"?>
 <ct:contentTypeSchema xmlns:ct="http://schemas.microsoft.com/office/2006/metadata/contentType" xmlns:ma="http://schemas.microsoft.com/office/2006/metadata/properties/metaAttributes" ct:_="" ma:_="" ma:contentTypeName="Document" ma:contentTypeID="0x0101007069032936BB004A979B3FCE77DE1EB1" ma:contentTypeVersion="16" ma:contentTypeDescription="Create a new document." ma:contentTypeScope="" ma:versionID="59b39aa881a230c9f06045ed60478b88">
   <xsd:schema xmlns:xsd="http://www.w3.org/2001/XMLSchema" xmlns:xs="http://www.w3.org/2001/XMLSchema" xmlns:p="http://schemas.microsoft.com/office/2006/metadata/properties" xmlns:ns2="33f92c16-e346-46b5-ac57-2b519ac4cf68" xmlns:ns3="0efde304-9646-43d8-8eee-5b1a55ab17f1" xmlns:ns4="b6c9d19c-b34a-4cf4-8ebf-64c63fc48083" targetNamespace="http://schemas.microsoft.com/office/2006/metadata/properties" ma:root="true" ma:fieldsID="c596c03b60b8e16cee14ab235af6374a" ns2:_="" ns3:_="" ns4:_="">
     <xsd:import namespace="33f92c16-e346-46b5-ac57-2b519ac4cf68"/>
@@ -21168,6 +21349,17 @@
 </ct:contentTypeSchema>
 </file>
 
+<file path=customXml/item2.xml><?xml version="1.0" encoding="utf-8"?>
+<p:properties xmlns:p="http://schemas.microsoft.com/office/2006/metadata/properties" xmlns:xsi="http://www.w3.org/2001/XMLSchema-instance" xmlns:pc="http://schemas.microsoft.com/office/infopath/2007/PartnerControls">
+  <documentManagement>
+    <TaxCatchAll xmlns="b6c9d19c-b34a-4cf4-8ebf-64c63fc48083" xsi:nil="true"/>
+    <lcf76f155ced4ddcb4097134ff3c332f xmlns="33f92c16-e346-46b5-ac57-2b519ac4cf68">
+      <Terms xmlns="http://schemas.microsoft.com/office/infopath/2007/PartnerControls"/>
+    </lcf76f155ced4ddcb4097134ff3c332f>
+  </documentManagement>
+</p:properties>
+</file>
+
 <file path=customXml/item3.xml><?xml version="1.0" encoding="utf-8"?>
 <?mso-contentType ?>
 <FormTemplates xmlns="http://schemas.microsoft.com/sharepoint/v3/contenttype/forms">
@@ -21178,24 +21370,6 @@
 </file>
 
 <file path=customXml/itemProps1.xml><?xml version="1.0" encoding="utf-8"?>
-<ds:datastoreItem xmlns:ds="http://schemas.openxmlformats.org/officeDocument/2006/customXml" ds:itemID="{E709C047-1DE0-4980-A90A-4D5EFC165D2C}">
-  <ds:schemaRefs>
-    <ds:schemaRef ds:uri="0efde304-9646-43d8-8eee-5b1a55ab17f1"/>
-    <ds:schemaRef ds:uri="33f92c16-e346-46b5-ac57-2b519ac4cf68"/>
-    <ds:schemaRef ds:uri="b6c9d19c-b34a-4cf4-8ebf-64c63fc48083"/>
-    <ds:schemaRef ds:uri="http://purl.org/dc/dcmitype/"/>
-    <ds:schemaRef ds:uri="http://purl.org/dc/elements/1.1/"/>
-    <ds:schemaRef ds:uri="http://purl.org/dc/terms/"/>
-    <ds:schemaRef ds:uri="http://schemas.microsoft.com/office/2006/documentManagement/types"/>
-    <ds:schemaRef ds:uri="http://schemas.microsoft.com/office/2006/metadata/properties"/>
-    <ds:schemaRef ds:uri="http://schemas.microsoft.com/office/infopath/2007/PartnerControls"/>
-    <ds:schemaRef ds:uri="http://schemas.openxmlformats.org/package/2006/metadata/core-properties"/>
-    <ds:schemaRef ds:uri="http://www.w3.org/XML/1998/namespace"/>
-  </ds:schemaRefs>
-</ds:datastoreItem>
-</file>
-
-<file path=customXml/itemProps2.xml><?xml version="1.0" encoding="utf-8"?>
 <ds:datastoreItem xmlns:ds="http://schemas.openxmlformats.org/officeDocument/2006/customXml" ds:itemID="{2D7DA705-6300-4113-B183-485198D9C84E}">
   <ds:schemaRefs>
     <ds:schemaRef ds:uri="0efde304-9646-43d8-8eee-5b1a55ab17f1"/>
@@ -21215,6 +21389,24 @@
 </ds:datastoreItem>
 </file>
 
+<file path=customXml/itemProps2.xml><?xml version="1.0" encoding="utf-8"?>
+<ds:datastoreItem xmlns:ds="http://schemas.openxmlformats.org/officeDocument/2006/customXml" ds:itemID="{E709C047-1DE0-4980-A90A-4D5EFC165D2C}">
+  <ds:schemaRefs>
+    <ds:schemaRef ds:uri="0efde304-9646-43d8-8eee-5b1a55ab17f1"/>
+    <ds:schemaRef ds:uri="33f92c16-e346-46b5-ac57-2b519ac4cf68"/>
+    <ds:schemaRef ds:uri="b6c9d19c-b34a-4cf4-8ebf-64c63fc48083"/>
+    <ds:schemaRef ds:uri="http://purl.org/dc/dcmitype/"/>
+    <ds:schemaRef ds:uri="http://purl.org/dc/elements/1.1/"/>
+    <ds:schemaRef ds:uri="http://purl.org/dc/terms/"/>
+    <ds:schemaRef ds:uri="http://schemas.microsoft.com/office/2006/documentManagement/types"/>
+    <ds:schemaRef ds:uri="http://schemas.microsoft.com/office/2006/metadata/properties"/>
+    <ds:schemaRef ds:uri="http://schemas.microsoft.com/office/infopath/2007/PartnerControls"/>
+    <ds:schemaRef ds:uri="http://schemas.openxmlformats.org/package/2006/metadata/core-properties"/>
+    <ds:schemaRef ds:uri="http://www.w3.org/XML/1998/namespace"/>
+  </ds:schemaRefs>
+</ds:datastoreItem>
+</file>
+
 <file path=customXml/itemProps3.xml><?xml version="1.0" encoding="utf-8"?>
 <ds:datastoreItem xmlns:ds="http://schemas.openxmlformats.org/officeDocument/2006/customXml" ds:itemID="{EF0BFC65-ABD5-40EA-BAE0-821B9D6524E8}">
   <ds:schemaRefs>
